--- a/public/lessons/year-6-maths/summer/week-29/solve-geometry-and-statistics-problems/teaching-powerpoint-v1.pptx
+++ b/public/lessons/year-6-maths/summer/week-29/solve-geometry-and-statistics-problems/teaching-powerpoint-v1.pptx
@@ -2,24 +2,24 @@
 <file path=ppt/presentation.xml><?xml version="1.0" encoding="utf-8"?>
 <p:presentation xmlns:p="http://schemas.openxmlformats.org/presentationml/2006/main">
   <p:sldMasterIdLst>
-    <p:sldMasterId xmlns:r="http://schemas.openxmlformats.org/officeDocument/2006/relationships" id="2147483648" r:id="R460cb7f26b0342db"/>
+    <p:sldMasterId xmlns:r="http://schemas.openxmlformats.org/officeDocument/2006/relationships" id="2147483648" r:id="R7bb9483867cb4f94"/>
   </p:sldMasterIdLst>
   <p:notesMasterIdLst>
-    <p:notesMasterId xmlns:r="http://schemas.openxmlformats.org/officeDocument/2006/relationships" r:id="R6c062dd8ff264ce8"/>
+    <p:notesMasterId xmlns:r="http://schemas.openxmlformats.org/officeDocument/2006/relationships" r:id="Rf0461c8628054847"/>
   </p:notesMasterIdLst>
   <p:sldIdLst>
-    <p:sldId xmlns:r="http://schemas.openxmlformats.org/officeDocument/2006/relationships" id="256" r:id="R80551e549efb42ee"/>
-    <p:sldId xmlns:r="http://schemas.openxmlformats.org/officeDocument/2006/relationships" id="257" r:id="Re88b8cb870c64593"/>
-    <p:sldId xmlns:r="http://schemas.openxmlformats.org/officeDocument/2006/relationships" id="258" r:id="R2b7a640bce7b4885"/>
-    <p:sldId xmlns:r="http://schemas.openxmlformats.org/officeDocument/2006/relationships" id="259" r:id="R5b7f0a3a1a9e42a4"/>
-    <p:sldId xmlns:r="http://schemas.openxmlformats.org/officeDocument/2006/relationships" id="260" r:id="R5d1b7690e3444b68"/>
-    <p:sldId xmlns:r="http://schemas.openxmlformats.org/officeDocument/2006/relationships" id="261" r:id="R4c0b00c92e33439c"/>
-    <p:sldId xmlns:r="http://schemas.openxmlformats.org/officeDocument/2006/relationships" id="262" r:id="R6d13e0b733724b51"/>
-    <p:sldId xmlns:r="http://schemas.openxmlformats.org/officeDocument/2006/relationships" id="263" r:id="Ra70fa70ee6994511"/>
-    <p:sldId xmlns:r="http://schemas.openxmlformats.org/officeDocument/2006/relationships" id="264" r:id="R6fff28f2f9db47c7"/>
-    <p:sldId xmlns:r="http://schemas.openxmlformats.org/officeDocument/2006/relationships" id="265" r:id="R9a5e62784f44448d"/>
-    <p:sldId xmlns:r="http://schemas.openxmlformats.org/officeDocument/2006/relationships" id="266" r:id="R0de61cd020d64bb2"/>
-    <p:sldId xmlns:r="http://schemas.openxmlformats.org/officeDocument/2006/relationships" id="267" r:id="Rbe2f335467504d25"/>
+    <p:sldId xmlns:r="http://schemas.openxmlformats.org/officeDocument/2006/relationships" id="256" r:id="Rcb16a0e8d77843de"/>
+    <p:sldId xmlns:r="http://schemas.openxmlformats.org/officeDocument/2006/relationships" id="257" r:id="R0035928ce3994f62"/>
+    <p:sldId xmlns:r="http://schemas.openxmlformats.org/officeDocument/2006/relationships" id="258" r:id="Rdd4544ed0dec4c56"/>
+    <p:sldId xmlns:r="http://schemas.openxmlformats.org/officeDocument/2006/relationships" id="259" r:id="Rf6e65357df984593"/>
+    <p:sldId xmlns:r="http://schemas.openxmlformats.org/officeDocument/2006/relationships" id="260" r:id="R18a00f85dcf843f4"/>
+    <p:sldId xmlns:r="http://schemas.openxmlformats.org/officeDocument/2006/relationships" id="261" r:id="R3daf1325c9054d2b"/>
+    <p:sldId xmlns:r="http://schemas.openxmlformats.org/officeDocument/2006/relationships" id="262" r:id="R8d7aaf4c1bd94a63"/>
+    <p:sldId xmlns:r="http://schemas.openxmlformats.org/officeDocument/2006/relationships" id="263" r:id="R3c9263fd59cd400f"/>
+    <p:sldId xmlns:r="http://schemas.openxmlformats.org/officeDocument/2006/relationships" id="264" r:id="R32643b107dfe4288"/>
+    <p:sldId xmlns:r="http://schemas.openxmlformats.org/officeDocument/2006/relationships" id="265" r:id="Rc66e9eeef2234ddb"/>
+    <p:sldId xmlns:r="http://schemas.openxmlformats.org/officeDocument/2006/relationships" id="266" r:id="R28b05042cc2949db"/>
+    <p:sldId xmlns:r="http://schemas.openxmlformats.org/officeDocument/2006/relationships" id="267" r:id="R200061e34900452f"/>
   </p:sldIdLst>
   <p:sldSz cx="12192000" cy="6858000"/>
   <p:notesSz cx="6858000" cy="9144000"/>
@@ -593,7 +593,7 @@
           <a:lstStyle xmlns:a="http://schemas.openxmlformats.org/drawingml/2006/main"/>
           <a:p xmlns:a="http://schemas.openxmlformats.org/drawingml/2006/main">
             <a:r>
-              <a:t>Show only the core independent-practice example. Give pupils time to solve and check before revealing the answer at the side. Answer: 244.8.</a:t>
+              <a:t>Show only the core independent-practice example. Give pupils time to solve and check before revealing the answer at the side. Answer: 220.8.</a:t>
             </a:r>
           </a:p>
         </p:txBody>
@@ -663,7 +663,7 @@
           <a:lstStyle xmlns:a="http://schemas.openxmlformats.org/drawingml/2006/main"/>
           <a:p xmlns:a="http://schemas.openxmlformats.org/drawingml/2006/main">
             <a:r>
-              <a:t>Reveal one exit question at a time. Answers: 244.8. | Represent the relationships first, label each subtotal and test the final answer against every condition. | A relevant inverse, estimate, boundary, known fact or equivalent representation.. Record a specific next step from pupil work and explanation.</a:t>
+              <a:t>Reveal one exit question at a time. Answers: 220.8. | Represent the relationships first, label each subtotal and test the final answer against every condition. | A relevant inverse, estimate, boundary, known fact or equivalent representation.. Record a specific next step from pupil work and explanation.</a:t>
             </a:r>
           </a:p>
         </p:txBody>
@@ -873,7 +873,7 @@
           <a:lstStyle xmlns:a="http://schemas.openxmlformats.org/drawingml/2006/main"/>
           <a:p xmlns:a="http://schemas.openxmlformats.org/drawingml/2006/main">
             <a:r>
-              <a:t>I do. Reveal the question, setup and each calculation stage one click at a time. Pupils watch before copying. Model answer: 120 pupils.</a:t>
+              <a:t>I do. Reveal the question, then reveal each mathematical change one click at a time. Point to the numbers and operation that changed before moving to the next line. Final answer: 120 pupils.</a:t>
             </a:r>
           </a:p>
         </p:txBody>
@@ -1223,7 +1223,7 @@
           <a:lstStyle xmlns:a="http://schemas.openxmlformats.org/drawingml/2006/main"/>
           <a:p xmlns:a="http://schemas.openxmlformats.org/drawingml/2006/main">
             <a:r>
-              <a:t>You do. Pupils complete the core question independently before discussion. Answer: 244.8.. Circulate and note methods as well as accuracy.</a:t>
+              <a:t>You do. Pupils complete the core question independently before discussion. Answer: 220.8.. Circulate and note methods as well as accuracy.</a:t>
             </a:r>
           </a:p>
         </p:txBody>
@@ -1291,7 +1291,7 @@
   </p:cSld>
   <p:clrMap bg1="lt1" tx1="dk1" bg2="lt2" tx2="dk2" accent1="accent1" accent2="accent2" accent3="accent3" accent4="accent4" accent5="accent5" accent6="accent6" hlink="hlink" folHlink="folHlink"/>
   <p:sldLayoutIdLst>
-    <p:sldLayoutId xmlns:r="http://schemas.openxmlformats.org/officeDocument/2006/relationships" id="2147483649" r:id="Re709c9fee4e44539"/>
+    <p:sldLayoutId xmlns:r="http://schemas.openxmlformats.org/officeDocument/2006/relationships" id="2147483649" r:id="R5c729162cb2947b0"/>
   </p:sldLayoutIdLst>
   <p:txStyles>
     <p:titleStyle>
@@ -1842,7 +1842,7 @@
           <p:cNvPr id="12" name="">
             <a:extLst xmlns:a="http://schemas.openxmlformats.org/drawingml/2006/main">
               <a:ext uri="{FF2B5EF4-FFF2-40B4-BE49-F238E27FC236}">
-                <a16:creationId xmlns:a16="http://schemas.microsoft.com/office/drawing/2014/main" id="{D31A4E28-E51B-4D53-9296-80F2C21520AE}"/>
+                <a16:creationId xmlns:a16="http://schemas.microsoft.com/office/drawing/2014/main" id="{44DC14C3-D144-477A-BB62-63786B761092}"/>
               </a:ext>
             </a:extLst>
           </p:cNvPr>
@@ -1874,7 +1874,7 @@
           <p:cNvPr id="2" name="">
             <a:extLst xmlns:a="http://schemas.openxmlformats.org/drawingml/2006/main">
               <a:ext uri="{FF2B5EF4-FFF2-40B4-BE49-F238E27FC236}">
-                <a16:creationId xmlns:a16="http://schemas.microsoft.com/office/drawing/2014/main" id="{F24A65AA-B3E1-4FF4-89C5-972D2E5F88F2}"/>
+                <a16:creationId xmlns:a16="http://schemas.microsoft.com/office/drawing/2014/main" id="{47BBDB95-4B67-41A4-BFA9-BB54D920ADCC}"/>
               </a:ext>
             </a:extLst>
           </p:cNvPr>
@@ -1931,7 +1931,7 @@
           <p:cNvPr id="3" name="">
             <a:extLst xmlns:a="http://schemas.openxmlformats.org/drawingml/2006/main">
               <a:ext uri="{FF2B5EF4-FFF2-40B4-BE49-F238E27FC236}">
-                <a16:creationId xmlns:a16="http://schemas.microsoft.com/office/drawing/2014/main" id="{7F2FAC33-B5FA-4187-B983-B67352E77D9C}"/>
+                <a16:creationId xmlns:a16="http://schemas.microsoft.com/office/drawing/2014/main" id="{E0D2C760-66B1-4C6B-B790-066F053A6C52}"/>
               </a:ext>
             </a:extLst>
           </p:cNvPr>
@@ -1965,7 +1965,7 @@
           <p:cNvPr id="4" name="">
             <a:extLst xmlns:a="http://schemas.openxmlformats.org/drawingml/2006/main">
               <a:ext uri="{FF2B5EF4-FFF2-40B4-BE49-F238E27FC236}">
-                <a16:creationId xmlns:a16="http://schemas.microsoft.com/office/drawing/2014/main" id="{741C89C3-9DE3-4D3E-8796-667F8E547011}"/>
+                <a16:creationId xmlns:a16="http://schemas.microsoft.com/office/drawing/2014/main" id="{35B5ABF3-4663-408E-9A6C-C5585872A697}"/>
               </a:ext>
             </a:extLst>
           </p:cNvPr>
@@ -2022,7 +2022,7 @@
           <p:cNvPr id="5" name="">
             <a:extLst xmlns:a="http://schemas.openxmlformats.org/drawingml/2006/main">
               <a:ext uri="{FF2B5EF4-FFF2-40B4-BE49-F238E27FC236}">
-                <a16:creationId xmlns:a16="http://schemas.microsoft.com/office/drawing/2014/main" id="{2C70A9B2-05C0-43BE-ABA1-F555EC62B1E7}"/>
+                <a16:creationId xmlns:a16="http://schemas.microsoft.com/office/drawing/2014/main" id="{18CF92E4-CE4E-4248-AF33-C9ADA9C85F7F}"/>
               </a:ext>
             </a:extLst>
           </p:cNvPr>
@@ -2079,7 +2079,7 @@
           <p:cNvPr id="6" name="">
             <a:extLst xmlns:a="http://schemas.openxmlformats.org/drawingml/2006/main">
               <a:ext uri="{FF2B5EF4-FFF2-40B4-BE49-F238E27FC236}">
-                <a16:creationId xmlns:a16="http://schemas.microsoft.com/office/drawing/2014/main" id="{5DA4AE61-4EB9-4CF6-9A43-181C53E37661}"/>
+                <a16:creationId xmlns:a16="http://schemas.microsoft.com/office/drawing/2014/main" id="{E61A9A8F-3F95-46EB-9349-814CCFE501C4}"/>
               </a:ext>
             </a:extLst>
           </p:cNvPr>
@@ -2113,7 +2113,7 @@
           <p:cNvPr id="7" name="">
             <a:extLst xmlns:a="http://schemas.openxmlformats.org/drawingml/2006/main">
               <a:ext uri="{FF2B5EF4-FFF2-40B4-BE49-F238E27FC236}">
-                <a16:creationId xmlns:a16="http://schemas.microsoft.com/office/drawing/2014/main" id="{8002C890-D789-4228-85FC-08EBB96E65FA}"/>
+                <a16:creationId xmlns:a16="http://schemas.microsoft.com/office/drawing/2014/main" id="{5A22CD08-383A-4A6B-B4A8-36538E1AC302}"/>
               </a:ext>
             </a:extLst>
           </p:cNvPr>
@@ -2170,7 +2170,7 @@
           <p:cNvPr id="8" name="">
             <a:extLst xmlns:a="http://schemas.openxmlformats.org/drawingml/2006/main">
               <a:ext uri="{FF2B5EF4-FFF2-40B4-BE49-F238E27FC236}">
-                <a16:creationId xmlns:a16="http://schemas.microsoft.com/office/drawing/2014/main" id="{F2AF3F60-24B2-4320-9B22-4519418046AA}"/>
+                <a16:creationId xmlns:a16="http://schemas.microsoft.com/office/drawing/2014/main" id="{17CFB6D7-0F95-4401-8BAD-B6A008FEE1B9}"/>
               </a:ext>
             </a:extLst>
           </p:cNvPr>
@@ -2227,7 +2227,7 @@
           <p:cNvPr id="9" name="">
             <a:extLst xmlns:a="http://schemas.openxmlformats.org/drawingml/2006/main">
               <a:ext uri="{FF2B5EF4-FFF2-40B4-BE49-F238E27FC236}">
-                <a16:creationId xmlns:a16="http://schemas.microsoft.com/office/drawing/2014/main" id="{D1F28877-419B-4F37-A190-DB7AB006C14C}"/>
+                <a16:creationId xmlns:a16="http://schemas.microsoft.com/office/drawing/2014/main" id="{2A489096-C6BC-493B-A7F4-315B682C40A2}"/>
               </a:ext>
             </a:extLst>
           </p:cNvPr>
@@ -2284,7 +2284,7 @@
           <p:cNvPr id="10" name="">
             <a:extLst xmlns:a="http://schemas.openxmlformats.org/drawingml/2006/main">
               <a:ext uri="{FF2B5EF4-FFF2-40B4-BE49-F238E27FC236}">
-                <a16:creationId xmlns:a16="http://schemas.microsoft.com/office/drawing/2014/main" id="{DAF008EF-8F25-44AC-BAB6-7D484D95E5D1}"/>
+                <a16:creationId xmlns:a16="http://schemas.microsoft.com/office/drawing/2014/main" id="{64EBFBE9-BED6-4AD3-A712-58D49058F5FA}"/>
               </a:ext>
             </a:extLst>
           </p:cNvPr>
@@ -2341,7 +2341,7 @@
           <p:cNvPr id="11" name="">
             <a:extLst xmlns:a="http://schemas.openxmlformats.org/drawingml/2006/main">
               <a:ext uri="{FF2B5EF4-FFF2-40B4-BE49-F238E27FC236}">
-                <a16:creationId xmlns:a16="http://schemas.microsoft.com/office/drawing/2014/main" id="{9A6F0095-372D-4031-B09B-C31A3934661A}"/>
+                <a16:creationId xmlns:a16="http://schemas.microsoft.com/office/drawing/2014/main" id="{F7ABB371-2AF2-4E58-B459-CD37E214A48A}"/>
               </a:ext>
             </a:extLst>
           </p:cNvPr>
@@ -2396,7 +2396,7 @@
     </p:spTree>
     <p:extLst>
       <p:ext uri="{BB962C8B-B14F-4D97-AF65-F5344CB8AC3E}">
-        <p14:creationId xmlns:p14="http://schemas.microsoft.com/office/powerpoint/2010/main" val="882132957"/>
+        <p14:creationId xmlns:p14="http://schemas.microsoft.com/office/powerpoint/2010/main" val="1404819907"/>
       </p:ext>
     </p:extLst>
   </p:cSld>
@@ -2427,7 +2427,7 @@
           <p:cNvPr id="14" name="">
             <a:extLst xmlns:a="http://schemas.openxmlformats.org/drawingml/2006/main">
               <a:ext uri="{FF2B5EF4-FFF2-40B4-BE49-F238E27FC236}">
-                <a16:creationId xmlns:a16="http://schemas.microsoft.com/office/drawing/2014/main" id="{E867F571-72A6-4A27-8AAE-5FD13691CC75}"/>
+                <a16:creationId xmlns:a16="http://schemas.microsoft.com/office/drawing/2014/main" id="{A69B5D0C-6D60-4013-9CDD-FE41BDB7A27C}"/>
               </a:ext>
             </a:extLst>
           </p:cNvPr>
@@ -2459,7 +2459,7 @@
           <p:cNvPr id="2" name="">
             <a:extLst xmlns:a="http://schemas.openxmlformats.org/drawingml/2006/main">
               <a:ext uri="{FF2B5EF4-FFF2-40B4-BE49-F238E27FC236}">
-                <a16:creationId xmlns:a16="http://schemas.microsoft.com/office/drawing/2014/main" id="{86702510-531B-4C91-A92E-5AEB70DEA373}"/>
+                <a16:creationId xmlns:a16="http://schemas.microsoft.com/office/drawing/2014/main" id="{DCAF2415-68D6-4D5D-97F2-69AF2EB61E64}"/>
               </a:ext>
             </a:extLst>
           </p:cNvPr>
@@ -2516,7 +2516,7 @@
           <p:cNvPr id="3" name="">
             <a:extLst xmlns:a="http://schemas.openxmlformats.org/drawingml/2006/main">
               <a:ext uri="{FF2B5EF4-FFF2-40B4-BE49-F238E27FC236}">
-                <a16:creationId xmlns:a16="http://schemas.microsoft.com/office/drawing/2014/main" id="{8B3F495A-6707-451D-B7C7-855160C77047}"/>
+                <a16:creationId xmlns:a16="http://schemas.microsoft.com/office/drawing/2014/main" id="{7DEE06D4-DDEB-4793-A62B-B64CC2E5176B}"/>
               </a:ext>
             </a:extLst>
           </p:cNvPr>
@@ -2548,7 +2548,7 @@
           <p:cNvPr id="4" name="">
             <a:extLst xmlns:a="http://schemas.openxmlformats.org/drawingml/2006/main">
               <a:ext uri="{FF2B5EF4-FFF2-40B4-BE49-F238E27FC236}">
-                <a16:creationId xmlns:a16="http://schemas.microsoft.com/office/drawing/2014/main" id="{9A4FD3CF-6D67-4173-8748-9F14C9F2F108}"/>
+                <a16:creationId xmlns:a16="http://schemas.microsoft.com/office/drawing/2014/main" id="{8403CE23-8DC4-403C-9F11-295AD3A81121}"/>
               </a:ext>
             </a:extLst>
           </p:cNvPr>
@@ -2605,7 +2605,7 @@
           <p:cNvPr id="5" name="">
             <a:extLst xmlns:a="http://schemas.openxmlformats.org/drawingml/2006/main">
               <a:ext uri="{FF2B5EF4-FFF2-40B4-BE49-F238E27FC236}">
-                <a16:creationId xmlns:a16="http://schemas.microsoft.com/office/drawing/2014/main" id="{F957127D-01DD-4E46-B450-83150D421C52}"/>
+                <a16:creationId xmlns:a16="http://schemas.microsoft.com/office/drawing/2014/main" id="{0C0BEDC1-1CE9-4773-95B6-D6288AC8AD3D}"/>
               </a:ext>
             </a:extLst>
           </p:cNvPr>
@@ -2662,7 +2662,7 @@
           <p:cNvPr id="6" name="">
             <a:extLst xmlns:a="http://schemas.openxmlformats.org/drawingml/2006/main">
               <a:ext uri="{FF2B5EF4-FFF2-40B4-BE49-F238E27FC236}">
-                <a16:creationId xmlns:a16="http://schemas.microsoft.com/office/drawing/2014/main" id="{27A58418-7479-438E-9E9E-E1691DF40480}"/>
+                <a16:creationId xmlns:a16="http://schemas.microsoft.com/office/drawing/2014/main" id="{0B02077D-D5BC-4A7A-BC24-57DB53420AD3}"/>
               </a:ext>
             </a:extLst>
           </p:cNvPr>
@@ -2719,7 +2719,7 @@
           <p:cNvPr id="7" name="">
             <a:extLst xmlns:a="http://schemas.openxmlformats.org/drawingml/2006/main">
               <a:ext uri="{FF2B5EF4-FFF2-40B4-BE49-F238E27FC236}">
-                <a16:creationId xmlns:a16="http://schemas.microsoft.com/office/drawing/2014/main" id="{4AEAFD98-2534-47E4-83A2-3355D7F4ECB3}"/>
+                <a16:creationId xmlns:a16="http://schemas.microsoft.com/office/drawing/2014/main" id="{6EB93D79-122E-4A3A-98B3-4C3AB4D197AE}"/>
               </a:ext>
             </a:extLst>
           </p:cNvPr>
@@ -2751,7 +2751,7 @@
           <p:cNvPr id="8" name="">
             <a:extLst xmlns:a="http://schemas.openxmlformats.org/drawingml/2006/main">
               <a:ext uri="{FF2B5EF4-FFF2-40B4-BE49-F238E27FC236}">
-                <a16:creationId xmlns:a16="http://schemas.microsoft.com/office/drawing/2014/main" id="{0B00520F-34DD-48EB-B81F-E215AD7EE15E}"/>
+                <a16:creationId xmlns:a16="http://schemas.microsoft.com/office/drawing/2014/main" id="{2EAD9EC2-A8D0-44D9-915D-58250A102D62}"/>
               </a:ext>
             </a:extLst>
           </p:cNvPr>
@@ -2808,7 +2808,7 @@
           <p:cNvPr id="9" name="">
             <a:extLst xmlns:a="http://schemas.openxmlformats.org/drawingml/2006/main">
               <a:ext uri="{FF2B5EF4-FFF2-40B4-BE49-F238E27FC236}">
-                <a16:creationId xmlns:a16="http://schemas.microsoft.com/office/drawing/2014/main" id="{29380119-55D4-4105-A33A-731586441EF9}"/>
+                <a16:creationId xmlns:a16="http://schemas.microsoft.com/office/drawing/2014/main" id="{991FCEE4-51FD-45DA-A2CE-1E528C1561CE}"/>
               </a:ext>
             </a:extLst>
           </p:cNvPr>
@@ -2865,7 +2865,7 @@
           <p:cNvPr id="10" name="">
             <a:extLst xmlns:a="http://schemas.openxmlformats.org/drawingml/2006/main">
               <a:ext uri="{FF2B5EF4-FFF2-40B4-BE49-F238E27FC236}">
-                <a16:creationId xmlns:a16="http://schemas.microsoft.com/office/drawing/2014/main" id="{6B6D4336-15F2-4A0C-BC67-D9806DD8CF88}"/>
+                <a16:creationId xmlns:a16="http://schemas.microsoft.com/office/drawing/2014/main" id="{E6B68B43-603A-495F-8582-98CF42DA9952}"/>
               </a:ext>
             </a:extLst>
           </p:cNvPr>
@@ -2922,7 +2922,7 @@
           <p:cNvPr id="11" name="">
             <a:extLst xmlns:a="http://schemas.openxmlformats.org/drawingml/2006/main">
               <a:ext uri="{FF2B5EF4-FFF2-40B4-BE49-F238E27FC236}">
-                <a16:creationId xmlns:a16="http://schemas.microsoft.com/office/drawing/2014/main" id="{438EEE26-8D10-4D2D-8E36-6951425EB653}"/>
+                <a16:creationId xmlns:a16="http://schemas.microsoft.com/office/drawing/2014/main" id="{5CEB2FAA-F40E-446D-B5A7-7F790AF1667F}"/>
               </a:ext>
             </a:extLst>
           </p:cNvPr>
@@ -2979,7 +2979,7 @@
           <p:cNvPr id="12" name="">
             <a:extLst xmlns:a="http://schemas.openxmlformats.org/drawingml/2006/main">
               <a:ext uri="{FF2B5EF4-FFF2-40B4-BE49-F238E27FC236}">
-                <a16:creationId xmlns:a16="http://schemas.microsoft.com/office/drawing/2014/main" id="{764F535B-A7DD-44A2-958F-CE6EF56858AE}"/>
+                <a16:creationId xmlns:a16="http://schemas.microsoft.com/office/drawing/2014/main" id="{13E39CF7-C1C3-46BC-A876-0FEF4E6115FA}"/>
               </a:ext>
             </a:extLst>
           </p:cNvPr>
@@ -3036,7 +3036,7 @@
           <p:cNvPr id="13" name="">
             <a:extLst xmlns:a="http://schemas.openxmlformats.org/drawingml/2006/main">
               <a:ext uri="{FF2B5EF4-FFF2-40B4-BE49-F238E27FC236}">
-                <a16:creationId xmlns:a16="http://schemas.microsoft.com/office/drawing/2014/main" id="{86E21BD5-B155-4158-87B4-AC8BCE68CE6E}"/>
+                <a16:creationId xmlns:a16="http://schemas.microsoft.com/office/drawing/2014/main" id="{A373F9BA-2E86-4D06-8880-CDACABE2B2DE}"/>
               </a:ext>
             </a:extLst>
           </p:cNvPr>
@@ -3091,7 +3091,7 @@
     </p:spTree>
     <p:extLst>
       <p:ext uri="{BB962C8B-B14F-4D97-AF65-F5344CB8AC3E}">
-        <p14:creationId xmlns:p14="http://schemas.microsoft.com/office/powerpoint/2010/main" val="88569745"/>
+        <p14:creationId xmlns:p14="http://schemas.microsoft.com/office/powerpoint/2010/main" val="840336933"/>
       </p:ext>
     </p:extLst>
   </p:cSld>
@@ -3292,7 +3292,7 @@
           <p:cNvPr id="19" name="">
             <a:extLst xmlns:a="http://schemas.openxmlformats.org/drawingml/2006/main">
               <a:ext uri="{FF2B5EF4-FFF2-40B4-BE49-F238E27FC236}">
-                <a16:creationId xmlns:a16="http://schemas.microsoft.com/office/drawing/2014/main" id="{0BDBC74B-43EF-40A8-8DFC-74926918CFA3}"/>
+                <a16:creationId xmlns:a16="http://schemas.microsoft.com/office/drawing/2014/main" id="{AECA3174-B492-49C7-A7B5-5ED423F31025}"/>
               </a:ext>
             </a:extLst>
           </p:cNvPr>
@@ -3324,7 +3324,7 @@
           <p:cNvPr id="2" name="">
             <a:extLst xmlns:a="http://schemas.openxmlformats.org/drawingml/2006/main">
               <a:ext uri="{FF2B5EF4-FFF2-40B4-BE49-F238E27FC236}">
-                <a16:creationId xmlns:a16="http://schemas.microsoft.com/office/drawing/2014/main" id="{9AAB1DDE-98CD-43A8-9B1B-4D69F860987B}"/>
+                <a16:creationId xmlns:a16="http://schemas.microsoft.com/office/drawing/2014/main" id="{69E6F087-F867-41AA-8DE2-7DA6B3FB6B02}"/>
               </a:ext>
             </a:extLst>
           </p:cNvPr>
@@ -3381,7 +3381,7 @@
           <p:cNvPr id="3" name="">
             <a:extLst xmlns:a="http://schemas.openxmlformats.org/drawingml/2006/main">
               <a:ext uri="{FF2B5EF4-FFF2-40B4-BE49-F238E27FC236}">
-                <a16:creationId xmlns:a16="http://schemas.microsoft.com/office/drawing/2014/main" id="{04EFD6C0-B29D-40B1-949D-9E861E231A5F}"/>
+                <a16:creationId xmlns:a16="http://schemas.microsoft.com/office/drawing/2014/main" id="{FCEE04EE-317C-46CC-AE29-014062516806}"/>
               </a:ext>
             </a:extLst>
           </p:cNvPr>
@@ -3413,7 +3413,7 @@
           <p:cNvPr id="4" name="">
             <a:extLst xmlns:a="http://schemas.openxmlformats.org/drawingml/2006/main">
               <a:ext uri="{FF2B5EF4-FFF2-40B4-BE49-F238E27FC236}">
-                <a16:creationId xmlns:a16="http://schemas.microsoft.com/office/drawing/2014/main" id="{AD79C826-1A34-44E8-868E-7004A66B3DD7}"/>
+                <a16:creationId xmlns:a16="http://schemas.microsoft.com/office/drawing/2014/main" id="{F090EA8A-6EA4-4D17-BD58-113EE295F2BE}"/>
               </a:ext>
             </a:extLst>
           </p:cNvPr>
@@ -3470,7 +3470,7 @@
           <p:cNvPr id="5" name="">
             <a:extLst xmlns:a="http://schemas.openxmlformats.org/drawingml/2006/main">
               <a:ext uri="{FF2B5EF4-FFF2-40B4-BE49-F238E27FC236}">
-                <a16:creationId xmlns:a16="http://schemas.microsoft.com/office/drawing/2014/main" id="{7D926887-92F0-42EB-AFE0-F6AD730280E2}"/>
+                <a16:creationId xmlns:a16="http://schemas.microsoft.com/office/drawing/2014/main" id="{B1D28588-88FB-4F41-8783-BC11A3CA9F1F}"/>
               </a:ext>
             </a:extLst>
           </p:cNvPr>
@@ -3527,7 +3527,7 @@
           <p:cNvPr id="6" name="">
             <a:extLst xmlns:a="http://schemas.openxmlformats.org/drawingml/2006/main">
               <a:ext uri="{FF2B5EF4-FFF2-40B4-BE49-F238E27FC236}">
-                <a16:creationId xmlns:a16="http://schemas.microsoft.com/office/drawing/2014/main" id="{401F86D2-F2C5-4F24-8593-8E004C6E835A}"/>
+                <a16:creationId xmlns:a16="http://schemas.microsoft.com/office/drawing/2014/main" id="{3BBA952E-1DB0-4821-ADBA-124712E1662A}"/>
               </a:ext>
             </a:extLst>
           </p:cNvPr>
@@ -3584,7 +3584,7 @@
           <p:cNvPr id="7" name="">
             <a:extLst xmlns:a="http://schemas.openxmlformats.org/drawingml/2006/main">
               <a:ext uri="{FF2B5EF4-FFF2-40B4-BE49-F238E27FC236}">
-                <a16:creationId xmlns:a16="http://schemas.microsoft.com/office/drawing/2014/main" id="{EFDD55E3-C124-419A-A330-7C3D1A467450}"/>
+                <a16:creationId xmlns:a16="http://schemas.microsoft.com/office/drawing/2014/main" id="{A2AF6E11-4431-467D-98D0-9CF4D9CAD754}"/>
               </a:ext>
             </a:extLst>
           </p:cNvPr>
@@ -3616,7 +3616,7 @@
           <p:cNvPr id="8" name="">
             <a:extLst xmlns:a="http://schemas.openxmlformats.org/drawingml/2006/main">
               <a:ext uri="{FF2B5EF4-FFF2-40B4-BE49-F238E27FC236}">
-                <a16:creationId xmlns:a16="http://schemas.microsoft.com/office/drawing/2014/main" id="{8743A628-3049-4B52-8AB8-1DE328266E67}"/>
+                <a16:creationId xmlns:a16="http://schemas.microsoft.com/office/drawing/2014/main" id="{DC684BC5-D4D0-4BF6-9327-A551366618DC}"/>
               </a:ext>
             </a:extLst>
           </p:cNvPr>
@@ -3673,7 +3673,7 @@
           <p:cNvPr id="9" name="">
             <a:extLst xmlns:a="http://schemas.openxmlformats.org/drawingml/2006/main">
               <a:ext uri="{FF2B5EF4-FFF2-40B4-BE49-F238E27FC236}">
-                <a16:creationId xmlns:a16="http://schemas.microsoft.com/office/drawing/2014/main" id="{E68AE5E4-18F2-48EA-A413-9458725A2108}"/>
+                <a16:creationId xmlns:a16="http://schemas.microsoft.com/office/drawing/2014/main" id="{FBC316AD-7FC6-4B05-A31F-5E2F1A3CF419}"/>
               </a:ext>
             </a:extLst>
           </p:cNvPr>
@@ -3730,7 +3730,7 @@
           <p:cNvPr id="10" name="">
             <a:extLst xmlns:a="http://schemas.openxmlformats.org/drawingml/2006/main">
               <a:ext uri="{FF2B5EF4-FFF2-40B4-BE49-F238E27FC236}">
-                <a16:creationId xmlns:a16="http://schemas.microsoft.com/office/drawing/2014/main" id="{2CE3FF11-78BD-4156-A2A9-978476C66CE5}"/>
+                <a16:creationId xmlns:a16="http://schemas.microsoft.com/office/drawing/2014/main" id="{C7723806-1CB0-453E-A6D5-E8851AFF674F}"/>
               </a:ext>
             </a:extLst>
           </p:cNvPr>
@@ -3787,7 +3787,7 @@
           <p:cNvPr id="11" name="">
             <a:extLst xmlns:a="http://schemas.openxmlformats.org/drawingml/2006/main">
               <a:ext uri="{FF2B5EF4-FFF2-40B4-BE49-F238E27FC236}">
-                <a16:creationId xmlns:a16="http://schemas.microsoft.com/office/drawing/2014/main" id="{D46104C7-DFEF-4D17-A0D5-CAEBEF976F59}"/>
+                <a16:creationId xmlns:a16="http://schemas.microsoft.com/office/drawing/2014/main" id="{FC2F8773-33AB-4B02-B236-06239C868BC3}"/>
               </a:ext>
             </a:extLst>
           </p:cNvPr>
@@ -3821,7 +3821,7 @@
           <p:cNvPr id="12" name="">
             <a:extLst xmlns:a="http://schemas.openxmlformats.org/drawingml/2006/main">
               <a:ext uri="{FF2B5EF4-FFF2-40B4-BE49-F238E27FC236}">
-                <a16:creationId xmlns:a16="http://schemas.microsoft.com/office/drawing/2014/main" id="{811CD6D8-949A-47EE-8E7B-DC00831BCB26}"/>
+                <a16:creationId xmlns:a16="http://schemas.microsoft.com/office/drawing/2014/main" id="{5AA6D399-FFEC-4F14-878D-A7B54BB1FFDB}"/>
               </a:ext>
             </a:extLst>
           </p:cNvPr>
@@ -3878,7 +3878,7 @@
           <p:cNvPr id="13" name="">
             <a:extLst xmlns:a="http://schemas.openxmlformats.org/drawingml/2006/main">
               <a:ext uri="{FF2B5EF4-FFF2-40B4-BE49-F238E27FC236}">
-                <a16:creationId xmlns:a16="http://schemas.microsoft.com/office/drawing/2014/main" id="{B87F7CDD-101A-4039-A535-AB458A3BF9AC}"/>
+                <a16:creationId xmlns:a16="http://schemas.microsoft.com/office/drawing/2014/main" id="{1468268E-7FF5-4F32-828C-57A90AB02B2C}"/>
               </a:ext>
             </a:extLst>
           </p:cNvPr>
@@ -3935,7 +3935,7 @@
           <p:cNvPr id="14" name="">
             <a:extLst xmlns:a="http://schemas.openxmlformats.org/drawingml/2006/main">
               <a:ext uri="{FF2B5EF4-FFF2-40B4-BE49-F238E27FC236}">
-                <a16:creationId xmlns:a16="http://schemas.microsoft.com/office/drawing/2014/main" id="{62120E4B-CD75-46B0-BD20-3E71457DD3D7}"/>
+                <a16:creationId xmlns:a16="http://schemas.microsoft.com/office/drawing/2014/main" id="{12DF35B0-B0ED-4AD3-9108-4AF2F7570776}"/>
               </a:ext>
             </a:extLst>
           </p:cNvPr>
@@ -3992,7 +3992,7 @@
           <p:cNvPr id="15" name="">
             <a:extLst xmlns:a="http://schemas.openxmlformats.org/drawingml/2006/main">
               <a:ext uri="{FF2B5EF4-FFF2-40B4-BE49-F238E27FC236}">
-                <a16:creationId xmlns:a16="http://schemas.microsoft.com/office/drawing/2014/main" id="{7DC99260-79BD-4258-9CCE-5DDFDBF04B7D}"/>
+                <a16:creationId xmlns:a16="http://schemas.microsoft.com/office/drawing/2014/main" id="{4B0B0A57-9178-4B14-853D-5A692875F672}"/>
               </a:ext>
             </a:extLst>
           </p:cNvPr>
@@ -4026,7 +4026,7 @@
           <p:cNvPr id="16" name="">
             <a:extLst xmlns:a="http://schemas.openxmlformats.org/drawingml/2006/main">
               <a:ext uri="{FF2B5EF4-FFF2-40B4-BE49-F238E27FC236}">
-                <a16:creationId xmlns:a16="http://schemas.microsoft.com/office/drawing/2014/main" id="{268CA0D9-4FF7-43D6-B1A2-2ED50D3D9175}"/>
+                <a16:creationId xmlns:a16="http://schemas.microsoft.com/office/drawing/2014/main" id="{5AFA52E5-D47C-4D7F-8C96-028EE6888D4A}"/>
               </a:ext>
             </a:extLst>
           </p:cNvPr>
@@ -4073,7 +4073,7 @@
                 <a:ea typeface="Arial"/>
                 <a:cs typeface="Arial"/>
               </a:rPr>
-              <a:t>244.8.</a:t>
+              <a:t>220.8.</a:t>
             </a:r>
           </a:p>
         </p:txBody>
@@ -4083,7 +4083,7 @@
           <p:cNvPr id="17" name="">
             <a:extLst xmlns:a="http://schemas.openxmlformats.org/drawingml/2006/main">
               <a:ext uri="{FF2B5EF4-FFF2-40B4-BE49-F238E27FC236}">
-                <a16:creationId xmlns:a16="http://schemas.microsoft.com/office/drawing/2014/main" id="{CF1524F3-F7B1-40CB-B325-A1882FA29661}"/>
+                <a16:creationId xmlns:a16="http://schemas.microsoft.com/office/drawing/2014/main" id="{1FCB2FF7-82A9-469E-A6F8-774C11F5E0FD}"/>
               </a:ext>
             </a:extLst>
           </p:cNvPr>
@@ -4140,7 +4140,7 @@
           <p:cNvPr id="18" name="">
             <a:extLst xmlns:a="http://schemas.openxmlformats.org/drawingml/2006/main">
               <a:ext uri="{FF2B5EF4-FFF2-40B4-BE49-F238E27FC236}">
-                <a16:creationId xmlns:a16="http://schemas.microsoft.com/office/drawing/2014/main" id="{20A62A16-0003-4A0E-A6D6-FC701E1E0CB1}"/>
+                <a16:creationId xmlns:a16="http://schemas.microsoft.com/office/drawing/2014/main" id="{025F4FF0-4F98-4F96-B4DC-44E4DED3BC8F}"/>
               </a:ext>
             </a:extLst>
           </p:cNvPr>
@@ -4195,7 +4195,7 @@
     </p:spTree>
     <p:extLst>
       <p:ext uri="{BB962C8B-B14F-4D97-AF65-F5344CB8AC3E}">
-        <p14:creationId xmlns:p14="http://schemas.microsoft.com/office/powerpoint/2010/main" val="1165136327"/>
+        <p14:creationId xmlns:p14="http://schemas.microsoft.com/office/powerpoint/2010/main" val="516950129"/>
       </p:ext>
     </p:extLst>
   </p:cSld>
@@ -4350,7 +4350,7 @@
           <p:cNvPr id="23" name="">
             <a:extLst xmlns:a="http://schemas.openxmlformats.org/drawingml/2006/main">
               <a:ext uri="{FF2B5EF4-FFF2-40B4-BE49-F238E27FC236}">
-                <a16:creationId xmlns:a16="http://schemas.microsoft.com/office/drawing/2014/main" id="{81A2F4C3-ABE4-4EEA-969A-86FA719A2845}"/>
+                <a16:creationId xmlns:a16="http://schemas.microsoft.com/office/drawing/2014/main" id="{37D3420B-08F7-4FE1-8B7F-E4E8A5B9D0DD}"/>
               </a:ext>
             </a:extLst>
           </p:cNvPr>
@@ -4382,7 +4382,7 @@
           <p:cNvPr id="2" name="">
             <a:extLst xmlns:a="http://schemas.openxmlformats.org/drawingml/2006/main">
               <a:ext uri="{FF2B5EF4-FFF2-40B4-BE49-F238E27FC236}">
-                <a16:creationId xmlns:a16="http://schemas.microsoft.com/office/drawing/2014/main" id="{2DBCE085-92DE-4D03-9D4C-B40A1249B187}"/>
+                <a16:creationId xmlns:a16="http://schemas.microsoft.com/office/drawing/2014/main" id="{C4B306B6-7414-43C5-ACA3-791F254E7861}"/>
               </a:ext>
             </a:extLst>
           </p:cNvPr>
@@ -4439,7 +4439,7 @@
           <p:cNvPr id="3" name="">
             <a:extLst xmlns:a="http://schemas.openxmlformats.org/drawingml/2006/main">
               <a:ext uri="{FF2B5EF4-FFF2-40B4-BE49-F238E27FC236}">
-                <a16:creationId xmlns:a16="http://schemas.microsoft.com/office/drawing/2014/main" id="{3F12EFA6-4E2C-418A-93AA-8BEE51B1DFFE}"/>
+                <a16:creationId xmlns:a16="http://schemas.microsoft.com/office/drawing/2014/main" id="{ED9A8AC8-6882-470C-A7E1-06B3D37DD440}"/>
               </a:ext>
             </a:extLst>
           </p:cNvPr>
@@ -4471,7 +4471,7 @@
           <p:cNvPr id="4" name="">
             <a:extLst xmlns:a="http://schemas.openxmlformats.org/drawingml/2006/main">
               <a:ext uri="{FF2B5EF4-FFF2-40B4-BE49-F238E27FC236}">
-                <a16:creationId xmlns:a16="http://schemas.microsoft.com/office/drawing/2014/main" id="{BDCC8B0F-C28A-462A-AC51-249EE6A9E9F8}"/>
+                <a16:creationId xmlns:a16="http://schemas.microsoft.com/office/drawing/2014/main" id="{EE7D2828-D15F-44B8-91E8-7724B66C03A7}"/>
               </a:ext>
             </a:extLst>
           </p:cNvPr>
@@ -4528,7 +4528,7 @@
           <p:cNvPr id="5" name="">
             <a:extLst xmlns:a="http://schemas.openxmlformats.org/drawingml/2006/main">
               <a:ext uri="{FF2B5EF4-FFF2-40B4-BE49-F238E27FC236}">
-                <a16:creationId xmlns:a16="http://schemas.microsoft.com/office/drawing/2014/main" id="{C663F6AD-F62D-4B69-A309-743482BA6A44}"/>
+                <a16:creationId xmlns:a16="http://schemas.microsoft.com/office/drawing/2014/main" id="{EFD22881-7EBB-4911-9A36-97BE692C18B2}"/>
               </a:ext>
             </a:extLst>
           </p:cNvPr>
@@ -4585,7 +4585,7 @@
           <p:cNvPr id="6" name="">
             <a:extLst xmlns:a="http://schemas.openxmlformats.org/drawingml/2006/main">
               <a:ext uri="{FF2B5EF4-FFF2-40B4-BE49-F238E27FC236}">
-                <a16:creationId xmlns:a16="http://schemas.microsoft.com/office/drawing/2014/main" id="{D572A299-78A8-4FFA-9553-1E9D4A4DAB4F}"/>
+                <a16:creationId xmlns:a16="http://schemas.microsoft.com/office/drawing/2014/main" id="{778B640D-9E65-413B-AFE0-410DB40C76BF}"/>
               </a:ext>
             </a:extLst>
           </p:cNvPr>
@@ -4642,7 +4642,7 @@
           <p:cNvPr id="7" name="">
             <a:extLst xmlns:a="http://schemas.openxmlformats.org/drawingml/2006/main">
               <a:ext uri="{FF2B5EF4-FFF2-40B4-BE49-F238E27FC236}">
-                <a16:creationId xmlns:a16="http://schemas.microsoft.com/office/drawing/2014/main" id="{43DE8B76-BC99-4BBA-A70D-D505CCA2F581}"/>
+                <a16:creationId xmlns:a16="http://schemas.microsoft.com/office/drawing/2014/main" id="{C5A7BDA0-498C-436C-B4B6-43AE88D7A864}"/>
               </a:ext>
             </a:extLst>
           </p:cNvPr>
@@ -4674,7 +4674,7 @@
           <p:cNvPr id="8" name="">
             <a:extLst xmlns:a="http://schemas.openxmlformats.org/drawingml/2006/main">
               <a:ext uri="{FF2B5EF4-FFF2-40B4-BE49-F238E27FC236}">
-                <a16:creationId xmlns:a16="http://schemas.microsoft.com/office/drawing/2014/main" id="{66AF0768-1596-4EF4-8B82-D27074DF6A93}"/>
+                <a16:creationId xmlns:a16="http://schemas.microsoft.com/office/drawing/2014/main" id="{08EA2706-6744-44F8-9DCE-9923B5823268}"/>
               </a:ext>
             </a:extLst>
           </p:cNvPr>
@@ -4731,7 +4731,7 @@
           <p:cNvPr id="9" name="">
             <a:extLst xmlns:a="http://schemas.openxmlformats.org/drawingml/2006/main">
               <a:ext uri="{FF2B5EF4-FFF2-40B4-BE49-F238E27FC236}">
-                <a16:creationId xmlns:a16="http://schemas.microsoft.com/office/drawing/2014/main" id="{18F4C965-E77E-4A64-B104-256ECD2BC354}"/>
+                <a16:creationId xmlns:a16="http://schemas.microsoft.com/office/drawing/2014/main" id="{7A89B113-6AF6-43B9-9C4C-51F17E3D7A5E}"/>
               </a:ext>
             </a:extLst>
           </p:cNvPr>
@@ -4788,7 +4788,7 @@
           <p:cNvPr id="10" name="">
             <a:extLst xmlns:a="http://schemas.openxmlformats.org/drawingml/2006/main">
               <a:ext uri="{FF2B5EF4-FFF2-40B4-BE49-F238E27FC236}">
-                <a16:creationId xmlns:a16="http://schemas.microsoft.com/office/drawing/2014/main" id="{59EE7FE8-C8A9-4BF6-A4A3-0335E7A32665}"/>
+                <a16:creationId xmlns:a16="http://schemas.microsoft.com/office/drawing/2014/main" id="{606B5295-C52D-4090-A505-9C49A7C3D370}"/>
               </a:ext>
             </a:extLst>
           </p:cNvPr>
@@ -4822,7 +4822,7 @@
           <p:cNvPr id="11" name="">
             <a:extLst xmlns:a="http://schemas.openxmlformats.org/drawingml/2006/main">
               <a:ext uri="{FF2B5EF4-FFF2-40B4-BE49-F238E27FC236}">
-                <a16:creationId xmlns:a16="http://schemas.microsoft.com/office/drawing/2014/main" id="{7033B7C2-45DB-4E9E-BF3A-07A014A4AC56}"/>
+                <a16:creationId xmlns:a16="http://schemas.microsoft.com/office/drawing/2014/main" id="{4581EC91-C764-4FB6-9AF1-784D10D54C25}"/>
               </a:ext>
             </a:extLst>
           </p:cNvPr>
@@ -4854,7 +4854,7 @@
           <p:cNvPr id="12" name="">
             <a:extLst xmlns:a="http://schemas.openxmlformats.org/drawingml/2006/main">
               <a:ext uri="{FF2B5EF4-FFF2-40B4-BE49-F238E27FC236}">
-                <a16:creationId xmlns:a16="http://schemas.microsoft.com/office/drawing/2014/main" id="{E3E08069-ECE0-47E5-A11C-8E9C5B6D90E2}"/>
+                <a16:creationId xmlns:a16="http://schemas.microsoft.com/office/drawing/2014/main" id="{725361B4-E070-45D7-AA7C-AC5A537EBD9A}"/>
               </a:ext>
             </a:extLst>
           </p:cNvPr>
@@ -4911,7 +4911,7 @@
           <p:cNvPr id="13" name="">
             <a:extLst xmlns:a="http://schemas.openxmlformats.org/drawingml/2006/main">
               <a:ext uri="{FF2B5EF4-FFF2-40B4-BE49-F238E27FC236}">
-                <a16:creationId xmlns:a16="http://schemas.microsoft.com/office/drawing/2014/main" id="{4795CEAA-0FAE-4030-A786-0F4D86EA6BBF}"/>
+                <a16:creationId xmlns:a16="http://schemas.microsoft.com/office/drawing/2014/main" id="{B7BF8C30-1EBC-4DCE-863B-43E6770E1810}"/>
               </a:ext>
             </a:extLst>
           </p:cNvPr>
@@ -4968,7 +4968,7 @@
           <p:cNvPr id="14" name="">
             <a:extLst xmlns:a="http://schemas.openxmlformats.org/drawingml/2006/main">
               <a:ext uri="{FF2B5EF4-FFF2-40B4-BE49-F238E27FC236}">
-                <a16:creationId xmlns:a16="http://schemas.microsoft.com/office/drawing/2014/main" id="{5D92FF69-2A17-4866-BCD8-C1A9BAB1E5F2}"/>
+                <a16:creationId xmlns:a16="http://schemas.microsoft.com/office/drawing/2014/main" id="{4DD0352D-1DE9-4C05-97BC-6E2AA741D76E}"/>
               </a:ext>
             </a:extLst>
           </p:cNvPr>
@@ -5002,7 +5002,7 @@
           <p:cNvPr id="15" name="">
             <a:extLst xmlns:a="http://schemas.openxmlformats.org/drawingml/2006/main">
               <a:ext uri="{FF2B5EF4-FFF2-40B4-BE49-F238E27FC236}">
-                <a16:creationId xmlns:a16="http://schemas.microsoft.com/office/drawing/2014/main" id="{F1668337-66DC-4D9A-9888-EFD38049F28B}"/>
+                <a16:creationId xmlns:a16="http://schemas.microsoft.com/office/drawing/2014/main" id="{17C92893-8E47-4AE6-90A8-679920FC8964}"/>
               </a:ext>
             </a:extLst>
           </p:cNvPr>
@@ -5034,7 +5034,7 @@
           <p:cNvPr id="16" name="">
             <a:extLst xmlns:a="http://schemas.openxmlformats.org/drawingml/2006/main">
               <a:ext uri="{FF2B5EF4-FFF2-40B4-BE49-F238E27FC236}">
-                <a16:creationId xmlns:a16="http://schemas.microsoft.com/office/drawing/2014/main" id="{3D67FB59-6940-446C-96D1-4E3EC6E8A88E}"/>
+                <a16:creationId xmlns:a16="http://schemas.microsoft.com/office/drawing/2014/main" id="{2D66BAE4-E8D6-49B9-A3AB-DFD3B55D6A9F}"/>
               </a:ext>
             </a:extLst>
           </p:cNvPr>
@@ -5091,7 +5091,7 @@
           <p:cNvPr id="17" name="">
             <a:extLst xmlns:a="http://schemas.openxmlformats.org/drawingml/2006/main">
               <a:ext uri="{FF2B5EF4-FFF2-40B4-BE49-F238E27FC236}">
-                <a16:creationId xmlns:a16="http://schemas.microsoft.com/office/drawing/2014/main" id="{86D2986A-DED4-49FF-B0AF-47C102AF3B7E}"/>
+                <a16:creationId xmlns:a16="http://schemas.microsoft.com/office/drawing/2014/main" id="{FA4C461A-44BF-47C6-9C85-EE087CA12DC2}"/>
               </a:ext>
             </a:extLst>
           </p:cNvPr>
@@ -5148,7 +5148,7 @@
           <p:cNvPr id="18" name="">
             <a:extLst xmlns:a="http://schemas.openxmlformats.org/drawingml/2006/main">
               <a:ext uri="{FF2B5EF4-FFF2-40B4-BE49-F238E27FC236}">
-                <a16:creationId xmlns:a16="http://schemas.microsoft.com/office/drawing/2014/main" id="{C7864A67-13D1-45F6-A1B2-302CAE883E5B}"/>
+                <a16:creationId xmlns:a16="http://schemas.microsoft.com/office/drawing/2014/main" id="{E44F3E60-3402-4777-97EE-7552F35D5D95}"/>
               </a:ext>
             </a:extLst>
           </p:cNvPr>
@@ -5182,7 +5182,7 @@
           <p:cNvPr id="19" name="">
             <a:extLst xmlns:a="http://schemas.openxmlformats.org/drawingml/2006/main">
               <a:ext uri="{FF2B5EF4-FFF2-40B4-BE49-F238E27FC236}">
-                <a16:creationId xmlns:a16="http://schemas.microsoft.com/office/drawing/2014/main" id="{CF4B9FFA-888A-4309-BF28-D1C84FA05D76}"/>
+                <a16:creationId xmlns:a16="http://schemas.microsoft.com/office/drawing/2014/main" id="{A94896AC-E230-46DC-A8F0-0EDEE7FECD5B}"/>
               </a:ext>
             </a:extLst>
           </p:cNvPr>
@@ -5214,7 +5214,7 @@
           <p:cNvPr id="20" name="">
             <a:extLst xmlns:a="http://schemas.openxmlformats.org/drawingml/2006/main">
               <a:ext uri="{FF2B5EF4-FFF2-40B4-BE49-F238E27FC236}">
-                <a16:creationId xmlns:a16="http://schemas.microsoft.com/office/drawing/2014/main" id="{6111532E-6322-4DD3-BF78-C03B1A518876}"/>
+                <a16:creationId xmlns:a16="http://schemas.microsoft.com/office/drawing/2014/main" id="{1551192F-FB85-48F3-94A0-A81653914644}"/>
               </a:ext>
             </a:extLst>
           </p:cNvPr>
@@ -5271,7 +5271,7 @@
           <p:cNvPr id="21" name="">
             <a:extLst xmlns:a="http://schemas.openxmlformats.org/drawingml/2006/main">
               <a:ext uri="{FF2B5EF4-FFF2-40B4-BE49-F238E27FC236}">
-                <a16:creationId xmlns:a16="http://schemas.microsoft.com/office/drawing/2014/main" id="{F5040442-7B38-431D-A805-1F73145F2D55}"/>
+                <a16:creationId xmlns:a16="http://schemas.microsoft.com/office/drawing/2014/main" id="{1F4213F7-7AAE-4BFD-9648-DB7916DD135B}"/>
               </a:ext>
             </a:extLst>
           </p:cNvPr>
@@ -5328,7 +5328,7 @@
           <p:cNvPr id="22" name="">
             <a:extLst xmlns:a="http://schemas.openxmlformats.org/drawingml/2006/main">
               <a:ext uri="{FF2B5EF4-FFF2-40B4-BE49-F238E27FC236}">
-                <a16:creationId xmlns:a16="http://schemas.microsoft.com/office/drawing/2014/main" id="{5C980A25-8837-40F3-B1AC-B1BA3B66CEB3}"/>
+                <a16:creationId xmlns:a16="http://schemas.microsoft.com/office/drawing/2014/main" id="{0B2CA731-8584-449D-AD43-D43C522C7769}"/>
               </a:ext>
             </a:extLst>
           </p:cNvPr>
@@ -5383,7 +5383,7 @@
     </p:spTree>
     <p:extLst>
       <p:ext uri="{BB962C8B-B14F-4D97-AF65-F5344CB8AC3E}">
-        <p14:creationId xmlns:p14="http://schemas.microsoft.com/office/powerpoint/2010/main" val="1469442761"/>
+        <p14:creationId xmlns:p14="http://schemas.microsoft.com/office/powerpoint/2010/main" val="1152481873"/>
       </p:ext>
     </p:extLst>
   </p:cSld>
@@ -5584,7 +5584,7 @@
           <p:cNvPr id="23" name="">
             <a:extLst xmlns:a="http://schemas.openxmlformats.org/drawingml/2006/main">
               <a:ext uri="{FF2B5EF4-FFF2-40B4-BE49-F238E27FC236}">
-                <a16:creationId xmlns:a16="http://schemas.microsoft.com/office/drawing/2014/main" id="{2E80D466-46A6-4BB2-A258-9D8C0D6AF8CA}"/>
+                <a16:creationId xmlns:a16="http://schemas.microsoft.com/office/drawing/2014/main" id="{040A0C18-FB41-4C06-A792-0051F0A6018E}"/>
               </a:ext>
             </a:extLst>
           </p:cNvPr>
@@ -5616,7 +5616,7 @@
           <p:cNvPr id="2" name="">
             <a:extLst xmlns:a="http://schemas.openxmlformats.org/drawingml/2006/main">
               <a:ext uri="{FF2B5EF4-FFF2-40B4-BE49-F238E27FC236}">
-                <a16:creationId xmlns:a16="http://schemas.microsoft.com/office/drawing/2014/main" id="{F5FF156A-4DA4-4C02-88EF-1B9237353F4B}"/>
+                <a16:creationId xmlns:a16="http://schemas.microsoft.com/office/drawing/2014/main" id="{8C516D03-0770-4F99-A54D-580B9D5F2322}"/>
               </a:ext>
             </a:extLst>
           </p:cNvPr>
@@ -5673,7 +5673,7 @@
           <p:cNvPr id="3" name="">
             <a:extLst xmlns:a="http://schemas.openxmlformats.org/drawingml/2006/main">
               <a:ext uri="{FF2B5EF4-FFF2-40B4-BE49-F238E27FC236}">
-                <a16:creationId xmlns:a16="http://schemas.microsoft.com/office/drawing/2014/main" id="{44D522B3-E519-435B-995F-6F5656CF0942}"/>
+                <a16:creationId xmlns:a16="http://schemas.microsoft.com/office/drawing/2014/main" id="{87407D2F-B1E9-49BF-86D7-81D5A09D6184}"/>
               </a:ext>
             </a:extLst>
           </p:cNvPr>
@@ -5705,7 +5705,7 @@
           <p:cNvPr id="4" name="">
             <a:extLst xmlns:a="http://schemas.openxmlformats.org/drawingml/2006/main">
               <a:ext uri="{FF2B5EF4-FFF2-40B4-BE49-F238E27FC236}">
-                <a16:creationId xmlns:a16="http://schemas.microsoft.com/office/drawing/2014/main" id="{5BC8C99E-54D6-4333-8FF4-F84234E2C2AB}"/>
+                <a16:creationId xmlns:a16="http://schemas.microsoft.com/office/drawing/2014/main" id="{C4C256DC-1E52-44E4-86DF-44AD00F5E011}"/>
               </a:ext>
             </a:extLst>
           </p:cNvPr>
@@ -5762,7 +5762,7 @@
           <p:cNvPr id="5" name="">
             <a:extLst xmlns:a="http://schemas.openxmlformats.org/drawingml/2006/main">
               <a:ext uri="{FF2B5EF4-FFF2-40B4-BE49-F238E27FC236}">
-                <a16:creationId xmlns:a16="http://schemas.microsoft.com/office/drawing/2014/main" id="{9B5A599A-B5E1-493B-8ADF-32C92B32F89D}"/>
+                <a16:creationId xmlns:a16="http://schemas.microsoft.com/office/drawing/2014/main" id="{95B44335-6FF1-4487-8A39-626F65CB4C69}"/>
               </a:ext>
             </a:extLst>
           </p:cNvPr>
@@ -5819,7 +5819,7 @@
           <p:cNvPr id="6" name="">
             <a:extLst xmlns:a="http://schemas.openxmlformats.org/drawingml/2006/main">
               <a:ext uri="{FF2B5EF4-FFF2-40B4-BE49-F238E27FC236}">
-                <a16:creationId xmlns:a16="http://schemas.microsoft.com/office/drawing/2014/main" id="{6EC9481D-B779-4C8D-9CF1-49E1B50BBD00}"/>
+                <a16:creationId xmlns:a16="http://schemas.microsoft.com/office/drawing/2014/main" id="{D53FCBA9-84CB-4C68-95CA-D3B86A75B9D3}"/>
               </a:ext>
             </a:extLst>
           </p:cNvPr>
@@ -5876,7 +5876,7 @@
           <p:cNvPr id="7" name="">
             <a:extLst xmlns:a="http://schemas.openxmlformats.org/drawingml/2006/main">
               <a:ext uri="{FF2B5EF4-FFF2-40B4-BE49-F238E27FC236}">
-                <a16:creationId xmlns:a16="http://schemas.microsoft.com/office/drawing/2014/main" id="{5D20DF50-D3E0-40C4-A9B1-CA12B917D474}"/>
+                <a16:creationId xmlns:a16="http://schemas.microsoft.com/office/drawing/2014/main" id="{D0F26204-484E-4BBA-9AF7-6C7B33BB464B}"/>
               </a:ext>
             </a:extLst>
           </p:cNvPr>
@@ -5908,7 +5908,7 @@
           <p:cNvPr id="8" name="">
             <a:extLst xmlns:a="http://schemas.openxmlformats.org/drawingml/2006/main">
               <a:ext uri="{FF2B5EF4-FFF2-40B4-BE49-F238E27FC236}">
-                <a16:creationId xmlns:a16="http://schemas.microsoft.com/office/drawing/2014/main" id="{1FB77979-95BD-455C-BDEF-26694E7227E7}"/>
+                <a16:creationId xmlns:a16="http://schemas.microsoft.com/office/drawing/2014/main" id="{5EA9DB48-3397-42CE-BD17-3D6629E47B82}"/>
               </a:ext>
             </a:extLst>
           </p:cNvPr>
@@ -5965,7 +5965,7 @@
           <p:cNvPr id="9" name="">
             <a:extLst xmlns:a="http://schemas.openxmlformats.org/drawingml/2006/main">
               <a:ext uri="{FF2B5EF4-FFF2-40B4-BE49-F238E27FC236}">
-                <a16:creationId xmlns:a16="http://schemas.microsoft.com/office/drawing/2014/main" id="{98EB4B35-C72A-4BC8-B8CE-3CEB45CD501A}"/>
+                <a16:creationId xmlns:a16="http://schemas.microsoft.com/office/drawing/2014/main" id="{1C55467F-29AA-4710-B93E-7B34B0D817B6}"/>
               </a:ext>
             </a:extLst>
           </p:cNvPr>
@@ -6022,7 +6022,7 @@
           <p:cNvPr id="10" name="">
             <a:extLst xmlns:a="http://schemas.openxmlformats.org/drawingml/2006/main">
               <a:ext uri="{FF2B5EF4-FFF2-40B4-BE49-F238E27FC236}">
-                <a16:creationId xmlns:a16="http://schemas.microsoft.com/office/drawing/2014/main" id="{15DCEB8B-9CF7-40CF-B6AC-B1D8C370E128}"/>
+                <a16:creationId xmlns:a16="http://schemas.microsoft.com/office/drawing/2014/main" id="{C02B205D-9324-4D66-BC7D-4C2E7110988C}"/>
               </a:ext>
             </a:extLst>
           </p:cNvPr>
@@ -6056,7 +6056,7 @@
           <p:cNvPr id="11" name="">
             <a:extLst xmlns:a="http://schemas.openxmlformats.org/drawingml/2006/main">
               <a:ext uri="{FF2B5EF4-FFF2-40B4-BE49-F238E27FC236}">
-                <a16:creationId xmlns:a16="http://schemas.microsoft.com/office/drawing/2014/main" id="{E46FC794-CC56-48D6-AF8D-AF28BE239437}"/>
+                <a16:creationId xmlns:a16="http://schemas.microsoft.com/office/drawing/2014/main" id="{8AF8170C-63AF-460E-9850-9C78B24FC08B}"/>
               </a:ext>
             </a:extLst>
           </p:cNvPr>
@@ -6088,7 +6088,7 @@
           <p:cNvPr id="12" name="">
             <a:extLst xmlns:a="http://schemas.openxmlformats.org/drawingml/2006/main">
               <a:ext uri="{FF2B5EF4-FFF2-40B4-BE49-F238E27FC236}">
-                <a16:creationId xmlns:a16="http://schemas.microsoft.com/office/drawing/2014/main" id="{D28A1B53-EF81-4A53-AE3B-5A16EF4E60AE}"/>
+                <a16:creationId xmlns:a16="http://schemas.microsoft.com/office/drawing/2014/main" id="{5F59B017-2249-40EB-A95E-5A912A901D45}"/>
               </a:ext>
             </a:extLst>
           </p:cNvPr>
@@ -6145,7 +6145,7 @@
           <p:cNvPr id="13" name="">
             <a:extLst xmlns:a="http://schemas.openxmlformats.org/drawingml/2006/main">
               <a:ext uri="{FF2B5EF4-FFF2-40B4-BE49-F238E27FC236}">
-                <a16:creationId xmlns:a16="http://schemas.microsoft.com/office/drawing/2014/main" id="{6DBD4EE2-AEA7-4494-8D9C-A1F8C58C36F1}"/>
+                <a16:creationId xmlns:a16="http://schemas.microsoft.com/office/drawing/2014/main" id="{5480B952-1C43-4BEB-BE59-54C78FC9A3A0}"/>
               </a:ext>
             </a:extLst>
           </p:cNvPr>
@@ -6202,7 +6202,7 @@
           <p:cNvPr id="14" name="">
             <a:extLst xmlns:a="http://schemas.openxmlformats.org/drawingml/2006/main">
               <a:ext uri="{FF2B5EF4-FFF2-40B4-BE49-F238E27FC236}">
-                <a16:creationId xmlns:a16="http://schemas.microsoft.com/office/drawing/2014/main" id="{C0C67F81-B8C9-4586-966B-B7E188ED4D14}"/>
+                <a16:creationId xmlns:a16="http://schemas.microsoft.com/office/drawing/2014/main" id="{107FD6B9-2D35-4F55-A9AF-ED1B3427692E}"/>
               </a:ext>
             </a:extLst>
           </p:cNvPr>
@@ -6236,7 +6236,7 @@
           <p:cNvPr id="15" name="">
             <a:extLst xmlns:a="http://schemas.openxmlformats.org/drawingml/2006/main">
               <a:ext uri="{FF2B5EF4-FFF2-40B4-BE49-F238E27FC236}">
-                <a16:creationId xmlns:a16="http://schemas.microsoft.com/office/drawing/2014/main" id="{8FB62DCE-8083-4FC2-805F-2EC95041A9D5}"/>
+                <a16:creationId xmlns:a16="http://schemas.microsoft.com/office/drawing/2014/main" id="{DB797839-5825-41C4-9C4D-CAE403E663C9}"/>
               </a:ext>
             </a:extLst>
           </p:cNvPr>
@@ -6268,7 +6268,7 @@
           <p:cNvPr id="16" name="">
             <a:extLst xmlns:a="http://schemas.openxmlformats.org/drawingml/2006/main">
               <a:ext uri="{FF2B5EF4-FFF2-40B4-BE49-F238E27FC236}">
-                <a16:creationId xmlns:a16="http://schemas.microsoft.com/office/drawing/2014/main" id="{658AF7AA-DB84-4B64-B411-9CF544998796}"/>
+                <a16:creationId xmlns:a16="http://schemas.microsoft.com/office/drawing/2014/main" id="{A93CAAF6-6E58-4EB0-8854-39DEB719EE9A}"/>
               </a:ext>
             </a:extLst>
           </p:cNvPr>
@@ -6325,7 +6325,7 @@
           <p:cNvPr id="17" name="">
             <a:extLst xmlns:a="http://schemas.openxmlformats.org/drawingml/2006/main">
               <a:ext uri="{FF2B5EF4-FFF2-40B4-BE49-F238E27FC236}">
-                <a16:creationId xmlns:a16="http://schemas.microsoft.com/office/drawing/2014/main" id="{E942C5AE-BAAD-418B-BFA7-2C252F06749A}"/>
+                <a16:creationId xmlns:a16="http://schemas.microsoft.com/office/drawing/2014/main" id="{05166154-89AC-498A-8A42-181C84D33F8B}"/>
               </a:ext>
             </a:extLst>
           </p:cNvPr>
@@ -6382,7 +6382,7 @@
           <p:cNvPr id="18" name="">
             <a:extLst xmlns:a="http://schemas.openxmlformats.org/drawingml/2006/main">
               <a:ext uri="{FF2B5EF4-FFF2-40B4-BE49-F238E27FC236}">
-                <a16:creationId xmlns:a16="http://schemas.microsoft.com/office/drawing/2014/main" id="{3B09DD09-9F20-471A-B9AC-F525087CB687}"/>
+                <a16:creationId xmlns:a16="http://schemas.microsoft.com/office/drawing/2014/main" id="{7EA4A2EC-4F94-4C14-9020-DF244E270651}"/>
               </a:ext>
             </a:extLst>
           </p:cNvPr>
@@ -6416,7 +6416,7 @@
           <p:cNvPr id="19" name="">
             <a:extLst xmlns:a="http://schemas.openxmlformats.org/drawingml/2006/main">
               <a:ext uri="{FF2B5EF4-FFF2-40B4-BE49-F238E27FC236}">
-                <a16:creationId xmlns:a16="http://schemas.microsoft.com/office/drawing/2014/main" id="{8FA5ABD4-9B14-44DA-A0FB-3310429A58C2}"/>
+                <a16:creationId xmlns:a16="http://schemas.microsoft.com/office/drawing/2014/main" id="{297D77C1-3BFB-461A-8E0E-F23D7D4CEC43}"/>
               </a:ext>
             </a:extLst>
           </p:cNvPr>
@@ -6448,7 +6448,7 @@
           <p:cNvPr id="20" name="">
             <a:extLst xmlns:a="http://schemas.openxmlformats.org/drawingml/2006/main">
               <a:ext uri="{FF2B5EF4-FFF2-40B4-BE49-F238E27FC236}">
-                <a16:creationId xmlns:a16="http://schemas.microsoft.com/office/drawing/2014/main" id="{7E969FCA-A22B-4BAD-925D-A9595651829C}"/>
+                <a16:creationId xmlns:a16="http://schemas.microsoft.com/office/drawing/2014/main" id="{C3477FF5-AE37-4875-9F9E-46FBC6C985B2}"/>
               </a:ext>
             </a:extLst>
           </p:cNvPr>
@@ -6505,7 +6505,7 @@
           <p:cNvPr id="21" name="">
             <a:extLst xmlns:a="http://schemas.openxmlformats.org/drawingml/2006/main">
               <a:ext uri="{FF2B5EF4-FFF2-40B4-BE49-F238E27FC236}">
-                <a16:creationId xmlns:a16="http://schemas.microsoft.com/office/drawing/2014/main" id="{15126F37-4B42-4E8B-8DEF-B846668C7027}"/>
+                <a16:creationId xmlns:a16="http://schemas.microsoft.com/office/drawing/2014/main" id="{43D3F1F4-6275-44C0-BEE7-ACCF23897970}"/>
               </a:ext>
             </a:extLst>
           </p:cNvPr>
@@ -6562,7 +6562,7 @@
           <p:cNvPr id="22" name="">
             <a:extLst xmlns:a="http://schemas.openxmlformats.org/drawingml/2006/main">
               <a:ext uri="{FF2B5EF4-FFF2-40B4-BE49-F238E27FC236}">
-                <a16:creationId xmlns:a16="http://schemas.microsoft.com/office/drawing/2014/main" id="{2D9EB67B-BE54-469D-BEB2-AE63FCC19BD5}"/>
+                <a16:creationId xmlns:a16="http://schemas.microsoft.com/office/drawing/2014/main" id="{27A98CBB-3C49-4853-B167-E56551C72053}"/>
               </a:ext>
             </a:extLst>
           </p:cNvPr>
@@ -6617,7 +6617,7 @@
     </p:spTree>
     <p:extLst>
       <p:ext uri="{BB962C8B-B14F-4D97-AF65-F5344CB8AC3E}">
-        <p14:creationId xmlns:p14="http://schemas.microsoft.com/office/powerpoint/2010/main" val="655379564"/>
+        <p14:creationId xmlns:p14="http://schemas.microsoft.com/office/powerpoint/2010/main" val="808474033"/>
       </p:ext>
     </p:extLst>
   </p:cSld>
@@ -6818,7 +6818,7 @@
           <p:cNvPr id="16" name="">
             <a:extLst xmlns:a="http://schemas.openxmlformats.org/drawingml/2006/main">
               <a:ext uri="{FF2B5EF4-FFF2-40B4-BE49-F238E27FC236}">
-                <a16:creationId xmlns:a16="http://schemas.microsoft.com/office/drawing/2014/main" id="{EA3A19F8-D1FB-4CF2-83E7-1947CE12210D}"/>
+                <a16:creationId xmlns:a16="http://schemas.microsoft.com/office/drawing/2014/main" id="{E9C7C145-D4F4-473B-BBD3-40AE1A2433CB}"/>
               </a:ext>
             </a:extLst>
           </p:cNvPr>
@@ -6850,7 +6850,7 @@
           <p:cNvPr id="2" name="">
             <a:extLst xmlns:a="http://schemas.openxmlformats.org/drawingml/2006/main">
               <a:ext uri="{FF2B5EF4-FFF2-40B4-BE49-F238E27FC236}">
-                <a16:creationId xmlns:a16="http://schemas.microsoft.com/office/drawing/2014/main" id="{F88273AF-550A-4AA6-A7DC-23FFC8F03716}"/>
+                <a16:creationId xmlns:a16="http://schemas.microsoft.com/office/drawing/2014/main" id="{84BA0484-28FA-47C2-9F0D-E9E4F57B916B}"/>
               </a:ext>
             </a:extLst>
           </p:cNvPr>
@@ -6907,7 +6907,7 @@
           <p:cNvPr id="3" name="">
             <a:extLst xmlns:a="http://schemas.openxmlformats.org/drawingml/2006/main">
               <a:ext uri="{FF2B5EF4-FFF2-40B4-BE49-F238E27FC236}">
-                <a16:creationId xmlns:a16="http://schemas.microsoft.com/office/drawing/2014/main" id="{327B9529-61FA-4DC7-8D74-CACB500FB49A}"/>
+                <a16:creationId xmlns:a16="http://schemas.microsoft.com/office/drawing/2014/main" id="{AC26155D-C5D9-4E5F-B4CB-6A8A56A1F37D}"/>
               </a:ext>
             </a:extLst>
           </p:cNvPr>
@@ -6939,7 +6939,7 @@
           <p:cNvPr id="4" name="">
             <a:extLst xmlns:a="http://schemas.openxmlformats.org/drawingml/2006/main">
               <a:ext uri="{FF2B5EF4-FFF2-40B4-BE49-F238E27FC236}">
-                <a16:creationId xmlns:a16="http://schemas.microsoft.com/office/drawing/2014/main" id="{B2D31DF1-855E-4CE5-83B6-FF0C16969C5C}"/>
+                <a16:creationId xmlns:a16="http://schemas.microsoft.com/office/drawing/2014/main" id="{2CD83B58-501F-4BA2-858C-4772E5AC3775}"/>
               </a:ext>
             </a:extLst>
           </p:cNvPr>
@@ -6996,7 +6996,7 @@
           <p:cNvPr id="5" name="">
             <a:extLst xmlns:a="http://schemas.openxmlformats.org/drawingml/2006/main">
               <a:ext uri="{FF2B5EF4-FFF2-40B4-BE49-F238E27FC236}">
-                <a16:creationId xmlns:a16="http://schemas.microsoft.com/office/drawing/2014/main" id="{333158BE-7D59-4155-ABB4-774D0EE4EB87}"/>
+                <a16:creationId xmlns:a16="http://schemas.microsoft.com/office/drawing/2014/main" id="{B2F5E5CF-FF28-4908-9711-FD1BF91FB054}"/>
               </a:ext>
             </a:extLst>
           </p:cNvPr>
@@ -7053,7 +7053,7 @@
           <p:cNvPr id="6" name="">
             <a:extLst xmlns:a="http://schemas.openxmlformats.org/drawingml/2006/main">
               <a:ext uri="{FF2B5EF4-FFF2-40B4-BE49-F238E27FC236}">
-                <a16:creationId xmlns:a16="http://schemas.microsoft.com/office/drawing/2014/main" id="{421086CA-39F5-4DA8-90C8-FFE796922623}"/>
+                <a16:creationId xmlns:a16="http://schemas.microsoft.com/office/drawing/2014/main" id="{9465A064-5940-47C2-8A01-58A0627C18C3}"/>
               </a:ext>
             </a:extLst>
           </p:cNvPr>
@@ -7110,7 +7110,7 @@
           <p:cNvPr id="7" name="">
             <a:extLst xmlns:a="http://schemas.openxmlformats.org/drawingml/2006/main">
               <a:ext uri="{FF2B5EF4-FFF2-40B4-BE49-F238E27FC236}">
-                <a16:creationId xmlns:a16="http://schemas.microsoft.com/office/drawing/2014/main" id="{DE07A40A-E5BB-4271-BE4F-F0494F745D6F}"/>
+                <a16:creationId xmlns:a16="http://schemas.microsoft.com/office/drawing/2014/main" id="{044512FF-C298-4315-B675-EEF8211E58EF}"/>
               </a:ext>
             </a:extLst>
           </p:cNvPr>
@@ -7142,7 +7142,7 @@
           <p:cNvPr id="8" name="">
             <a:extLst xmlns:a="http://schemas.openxmlformats.org/drawingml/2006/main">
               <a:ext uri="{FF2B5EF4-FFF2-40B4-BE49-F238E27FC236}">
-                <a16:creationId xmlns:a16="http://schemas.microsoft.com/office/drawing/2014/main" id="{9D9C2B99-19FF-4AB2-AEFA-C0AF6EEAB3B8}"/>
+                <a16:creationId xmlns:a16="http://schemas.microsoft.com/office/drawing/2014/main" id="{4F25E23E-CCC5-4A84-8767-AAF72890FB8C}"/>
               </a:ext>
             </a:extLst>
           </p:cNvPr>
@@ -7199,7 +7199,7 @@
           <p:cNvPr id="9" name="">
             <a:extLst xmlns:a="http://schemas.openxmlformats.org/drawingml/2006/main">
               <a:ext uri="{FF2B5EF4-FFF2-40B4-BE49-F238E27FC236}">
-                <a16:creationId xmlns:a16="http://schemas.microsoft.com/office/drawing/2014/main" id="{487B3EB6-6C89-4334-875C-6FA04A21054A}"/>
+                <a16:creationId xmlns:a16="http://schemas.microsoft.com/office/drawing/2014/main" id="{6538D84C-27B4-46B5-AD97-4DBA4D5774D1}"/>
               </a:ext>
             </a:extLst>
           </p:cNvPr>
@@ -7256,7 +7256,7 @@
           <p:cNvPr id="10" name="">
             <a:extLst xmlns:a="http://schemas.openxmlformats.org/drawingml/2006/main">
               <a:ext uri="{FF2B5EF4-FFF2-40B4-BE49-F238E27FC236}">
-                <a16:creationId xmlns:a16="http://schemas.microsoft.com/office/drawing/2014/main" id="{3BCCBC8E-11FD-4E8D-9E7E-FC9B570F33F0}"/>
+                <a16:creationId xmlns:a16="http://schemas.microsoft.com/office/drawing/2014/main" id="{62C6F800-7CC2-4F4A-B9BF-6109ACEF767A}"/>
               </a:ext>
             </a:extLst>
           </p:cNvPr>
@@ -7313,7 +7313,7 @@
           <p:cNvPr id="11" name="">
             <a:extLst xmlns:a="http://schemas.openxmlformats.org/drawingml/2006/main">
               <a:ext uri="{FF2B5EF4-FFF2-40B4-BE49-F238E27FC236}">
-                <a16:creationId xmlns:a16="http://schemas.microsoft.com/office/drawing/2014/main" id="{18B57C2F-8614-4176-A8B0-7E5EC6A694E7}"/>
+                <a16:creationId xmlns:a16="http://schemas.microsoft.com/office/drawing/2014/main" id="{DA1898DF-6F36-4674-8D37-B8431A3584AC}"/>
               </a:ext>
             </a:extLst>
           </p:cNvPr>
@@ -7345,7 +7345,7 @@
           <p:cNvPr id="12" name="">
             <a:extLst xmlns:a="http://schemas.openxmlformats.org/drawingml/2006/main">
               <a:ext uri="{FF2B5EF4-FFF2-40B4-BE49-F238E27FC236}">
-                <a16:creationId xmlns:a16="http://schemas.microsoft.com/office/drawing/2014/main" id="{96FC6BA0-007B-4D84-BBBB-66B0DBF3D311}"/>
+                <a16:creationId xmlns:a16="http://schemas.microsoft.com/office/drawing/2014/main" id="{F5E47223-38D5-47F8-840E-BB9BCAF3C414}"/>
               </a:ext>
             </a:extLst>
           </p:cNvPr>
@@ -7402,7 +7402,7 @@
           <p:cNvPr id="13" name="">
             <a:extLst xmlns:a="http://schemas.openxmlformats.org/drawingml/2006/main">
               <a:ext uri="{FF2B5EF4-FFF2-40B4-BE49-F238E27FC236}">
-                <a16:creationId xmlns:a16="http://schemas.microsoft.com/office/drawing/2014/main" id="{FF6F8AD4-BBD0-4ECF-9EE0-9F390525185E}"/>
+                <a16:creationId xmlns:a16="http://schemas.microsoft.com/office/drawing/2014/main" id="{4E53CA78-0832-4CA8-9CC5-921FF6B8EE2D}"/>
               </a:ext>
             </a:extLst>
           </p:cNvPr>
@@ -7459,7 +7459,7 @@
           <p:cNvPr id="14" name="">
             <a:extLst xmlns:a="http://schemas.openxmlformats.org/drawingml/2006/main">
               <a:ext uri="{FF2B5EF4-FFF2-40B4-BE49-F238E27FC236}">
-                <a16:creationId xmlns:a16="http://schemas.microsoft.com/office/drawing/2014/main" id="{11F52A44-8A74-4B77-8A29-C9CE9E2D958E}"/>
+                <a16:creationId xmlns:a16="http://schemas.microsoft.com/office/drawing/2014/main" id="{94234420-6590-4343-AC3D-72EA6946A4E2}"/>
               </a:ext>
             </a:extLst>
           </p:cNvPr>
@@ -7516,7 +7516,7 @@
           <p:cNvPr id="15" name="">
             <a:extLst xmlns:a="http://schemas.openxmlformats.org/drawingml/2006/main">
               <a:ext uri="{FF2B5EF4-FFF2-40B4-BE49-F238E27FC236}">
-                <a16:creationId xmlns:a16="http://schemas.microsoft.com/office/drawing/2014/main" id="{CC354BFB-C909-41C5-AE50-3B12B8A799E3}"/>
+                <a16:creationId xmlns:a16="http://schemas.microsoft.com/office/drawing/2014/main" id="{B2AEB2CA-F61A-4E8E-80E9-DB66431AEBC2}"/>
               </a:ext>
             </a:extLst>
           </p:cNvPr>
@@ -7571,7 +7571,7 @@
     </p:spTree>
     <p:extLst>
       <p:ext uri="{BB962C8B-B14F-4D97-AF65-F5344CB8AC3E}">
-        <p14:creationId xmlns:p14="http://schemas.microsoft.com/office/powerpoint/2010/main" val="1470612103"/>
+        <p14:creationId xmlns:p14="http://schemas.microsoft.com/office/powerpoint/2010/main" val="471986431"/>
       </p:ext>
     </p:extLst>
   </p:cSld>
@@ -7772,7 +7772,7 @@
           <p:cNvPr id="23" name="">
             <a:extLst xmlns:a="http://schemas.openxmlformats.org/drawingml/2006/main">
               <a:ext uri="{FF2B5EF4-FFF2-40B4-BE49-F238E27FC236}">
-                <a16:creationId xmlns:a16="http://schemas.microsoft.com/office/drawing/2014/main" id="{02440C22-528D-4878-B5BA-6C233E456C0B}"/>
+                <a16:creationId xmlns:a16="http://schemas.microsoft.com/office/drawing/2014/main" id="{DB38E0F8-DB31-458F-8C21-818FFE262A73}"/>
               </a:ext>
             </a:extLst>
           </p:cNvPr>
@@ -7804,7 +7804,7 @@
           <p:cNvPr id="2" name="">
             <a:extLst xmlns:a="http://schemas.openxmlformats.org/drawingml/2006/main">
               <a:ext uri="{FF2B5EF4-FFF2-40B4-BE49-F238E27FC236}">
-                <a16:creationId xmlns:a16="http://schemas.microsoft.com/office/drawing/2014/main" id="{A0755FF9-0329-4925-A2E1-A594C78B01E1}"/>
+                <a16:creationId xmlns:a16="http://schemas.microsoft.com/office/drawing/2014/main" id="{CB93070F-E500-4C71-A0FC-47A5D2E888BF}"/>
               </a:ext>
             </a:extLst>
           </p:cNvPr>
@@ -7861,7 +7861,7 @@
           <p:cNvPr id="3" name="">
             <a:extLst xmlns:a="http://schemas.openxmlformats.org/drawingml/2006/main">
               <a:ext uri="{FF2B5EF4-FFF2-40B4-BE49-F238E27FC236}">
-                <a16:creationId xmlns:a16="http://schemas.microsoft.com/office/drawing/2014/main" id="{EAE2F999-D349-4D65-A8C6-C9DEF9BC0C73}"/>
+                <a16:creationId xmlns:a16="http://schemas.microsoft.com/office/drawing/2014/main" id="{8306531E-3ECC-409F-A520-DC551AAF2141}"/>
               </a:ext>
             </a:extLst>
           </p:cNvPr>
@@ -7893,7 +7893,7 @@
           <p:cNvPr id="4" name="">
             <a:extLst xmlns:a="http://schemas.openxmlformats.org/drawingml/2006/main">
               <a:ext uri="{FF2B5EF4-FFF2-40B4-BE49-F238E27FC236}">
-                <a16:creationId xmlns:a16="http://schemas.microsoft.com/office/drawing/2014/main" id="{3AAFA637-8553-4895-B5A1-F4B6BE75B0E4}"/>
+                <a16:creationId xmlns:a16="http://schemas.microsoft.com/office/drawing/2014/main" id="{C33400E9-101F-4485-90DC-BF6D34BF0BE8}"/>
               </a:ext>
             </a:extLst>
           </p:cNvPr>
@@ -7950,7 +7950,7 @@
           <p:cNvPr id="5" name="">
             <a:extLst xmlns:a="http://schemas.openxmlformats.org/drawingml/2006/main">
               <a:ext uri="{FF2B5EF4-FFF2-40B4-BE49-F238E27FC236}">
-                <a16:creationId xmlns:a16="http://schemas.microsoft.com/office/drawing/2014/main" id="{341B609B-39EA-419F-B61D-B411906FEF5E}"/>
+                <a16:creationId xmlns:a16="http://schemas.microsoft.com/office/drawing/2014/main" id="{BC8B76B1-EF30-491A-88FA-C16FEF715027}"/>
               </a:ext>
             </a:extLst>
           </p:cNvPr>
@@ -8007,7 +8007,7 @@
           <p:cNvPr id="6" name="">
             <a:extLst xmlns:a="http://schemas.openxmlformats.org/drawingml/2006/main">
               <a:ext uri="{FF2B5EF4-FFF2-40B4-BE49-F238E27FC236}">
-                <a16:creationId xmlns:a16="http://schemas.microsoft.com/office/drawing/2014/main" id="{B7071F8D-3C23-4F5E-A02E-237B4257EF49}"/>
+                <a16:creationId xmlns:a16="http://schemas.microsoft.com/office/drawing/2014/main" id="{B7D6B122-1D84-4404-BE33-C84365060545}"/>
               </a:ext>
             </a:extLst>
           </p:cNvPr>
@@ -8064,7 +8064,7 @@
           <p:cNvPr id="7" name="">
             <a:extLst xmlns:a="http://schemas.openxmlformats.org/drawingml/2006/main">
               <a:ext uri="{FF2B5EF4-FFF2-40B4-BE49-F238E27FC236}">
-                <a16:creationId xmlns:a16="http://schemas.microsoft.com/office/drawing/2014/main" id="{46EECF43-A1B8-42BC-A2EF-16C899916F0D}"/>
+                <a16:creationId xmlns:a16="http://schemas.microsoft.com/office/drawing/2014/main" id="{9A29F5B0-08CE-406A-863E-168A75FE99C2}"/>
               </a:ext>
             </a:extLst>
           </p:cNvPr>
@@ -8096,7 +8096,7 @@
           <p:cNvPr id="8" name="">
             <a:extLst xmlns:a="http://schemas.openxmlformats.org/drawingml/2006/main">
               <a:ext uri="{FF2B5EF4-FFF2-40B4-BE49-F238E27FC236}">
-                <a16:creationId xmlns:a16="http://schemas.microsoft.com/office/drawing/2014/main" id="{44F482B7-1531-4D59-93C1-4D03F4F157DC}"/>
+                <a16:creationId xmlns:a16="http://schemas.microsoft.com/office/drawing/2014/main" id="{7ED4B3EE-F4AF-4137-B6E1-95C0758C379A}"/>
               </a:ext>
             </a:extLst>
           </p:cNvPr>
@@ -8153,7 +8153,7 @@
           <p:cNvPr id="9" name="">
             <a:extLst xmlns:a="http://schemas.openxmlformats.org/drawingml/2006/main">
               <a:ext uri="{FF2B5EF4-FFF2-40B4-BE49-F238E27FC236}">
-                <a16:creationId xmlns:a16="http://schemas.microsoft.com/office/drawing/2014/main" id="{121A158B-401C-4047-87BB-B6B7BB3713B6}"/>
+                <a16:creationId xmlns:a16="http://schemas.microsoft.com/office/drawing/2014/main" id="{1251E96E-6EB3-4255-AB83-1578CECF32AD}"/>
               </a:ext>
             </a:extLst>
           </p:cNvPr>
@@ -8210,19 +8210,19 @@
           <p:cNvPr id="10" name="">
             <a:extLst xmlns:a="http://schemas.openxmlformats.org/drawingml/2006/main">
               <a:ext uri="{FF2B5EF4-FFF2-40B4-BE49-F238E27FC236}">
-                <a16:creationId xmlns:a16="http://schemas.microsoft.com/office/drawing/2014/main" id="{C3860B8B-7A75-4910-9DE0-D804F6629109}"/>
-              </a:ext>
-            </a:extLst>
-          </p:cNvPr>
-          <p:cNvSpPr>
-            <a:spLocks xmlns:a="http://schemas.openxmlformats.org/drawingml/2006/main" noGrp="1"/>
-          </p:cNvSpPr>
-          <p:nvPr/>
-        </p:nvSpPr>
-        <p:spPr>
-          <a:xfrm xmlns:a="http://schemas.openxmlformats.org/drawingml/2006/main">
-            <a:off x="914400" y="1257300"/>
-            <a:ext cx="10363200" cy="781050"/>
+                <a16:creationId xmlns:a16="http://schemas.microsoft.com/office/drawing/2014/main" id="{E5638FD8-4684-4C3E-825C-71BDE1FCE8AF}"/>
+              </a:ext>
+            </a:extLst>
+          </p:cNvPr>
+          <p:cNvSpPr>
+            <a:spLocks xmlns:a="http://schemas.openxmlformats.org/drawingml/2006/main" noGrp="1"/>
+          </p:cNvSpPr>
+          <p:nvPr/>
+        </p:nvSpPr>
+        <p:spPr>
+          <a:xfrm xmlns:a="http://schemas.openxmlformats.org/drawingml/2006/main">
+            <a:off x="857250" y="1219200"/>
+            <a:ext cx="10477500" cy="742950"/>
           </a:xfrm>
           <a:prstGeom xmlns:a="http://schemas.openxmlformats.org/drawingml/2006/main" prst="rect">
             <a:avLst/>
@@ -8239,7 +8239,7 @@
           <a:lstStyle xmlns:a="http://schemas.openxmlformats.org/drawingml/2006/main"/>
           <a:p xmlns:a="http://schemas.openxmlformats.org/drawingml/2006/main">
             <a:pPr algn="ctr">
-              <a:defRPr sz="2175" b="1">
+              <a:defRPr sz="2100" b="1">
                 <a:solidFill>
                   <a:srgbClr val="17253A"/>
                 </a:solidFill>
@@ -8249,7 +8249,7 @@
               </a:defRPr>
             </a:pPr>
             <a:r>
-              <a:rPr sz="2175" b="1">
+              <a:rPr sz="2100" b="1">
                 <a:solidFill>
                   <a:srgbClr val="17253A"/>
                 </a:solidFill>
@@ -8267,28 +8267,30 @@
           <p:cNvPr id="11" name="">
             <a:extLst xmlns:a="http://schemas.openxmlformats.org/drawingml/2006/main">
               <a:ext uri="{FF2B5EF4-FFF2-40B4-BE49-F238E27FC236}">
-                <a16:creationId xmlns:a16="http://schemas.microsoft.com/office/drawing/2014/main" id="{8B986DA8-99A2-46C1-A02D-73DC923AE6E8}"/>
-              </a:ext>
-            </a:extLst>
-          </p:cNvPr>
-          <p:cNvSpPr>
-            <a:spLocks xmlns:a="http://schemas.openxmlformats.org/drawingml/2006/main" noGrp="1"/>
-          </p:cNvSpPr>
-          <p:nvPr/>
-        </p:nvSpPr>
-        <p:spPr>
-          <a:xfrm xmlns:a="http://schemas.openxmlformats.org/drawingml/2006/main">
-            <a:off x="1000125" y="2247900"/>
-            <a:ext cx="476250" cy="476250"/>
-          </a:xfrm>
-          <a:prstGeom xmlns:a="http://schemas.openxmlformats.org/drawingml/2006/main" prst="ellipse">
+                <a16:creationId xmlns:a16="http://schemas.microsoft.com/office/drawing/2014/main" id="{6764B475-A362-4119-940F-6CD81FC07D67}"/>
+              </a:ext>
+            </a:extLst>
+          </p:cNvPr>
+          <p:cNvSpPr>
+            <a:spLocks xmlns:a="http://schemas.openxmlformats.org/drawingml/2006/main" noGrp="1"/>
+          </p:cNvSpPr>
+          <p:nvPr/>
+        </p:nvSpPr>
+        <p:spPr>
+          <a:xfrm xmlns:a="http://schemas.openxmlformats.org/drawingml/2006/main">
+            <a:off x="971550" y="2124075"/>
+            <a:ext cx="38100" cy="3524250"/>
+          </a:xfrm>
+          <a:prstGeom xmlns:a="http://schemas.openxmlformats.org/drawingml/2006/main" prst="rect">
             <a:avLst/>
           </a:prstGeom>
           <a:solidFill xmlns:a="http://schemas.openxmlformats.org/drawingml/2006/main">
-            <a:srgbClr val="18324A"/>
+            <a:srgbClr val="2C6E73"/>
           </a:solidFill>
           <a:ln xmlns:a="http://schemas.openxmlformats.org/drawingml/2006/main" w="0">
-            <a:noFill/>
+            <a:solidFill>
+              <a:srgbClr val="2C6E73"/>
+            </a:solidFill>
           </a:ln>
         </p:spPr>
       </p:sp>
@@ -8297,19 +8299,19 @@
           <p:cNvPr id="12" name="">
             <a:extLst xmlns:a="http://schemas.openxmlformats.org/drawingml/2006/main">
               <a:ext uri="{FF2B5EF4-FFF2-40B4-BE49-F238E27FC236}">
-                <a16:creationId xmlns:a16="http://schemas.microsoft.com/office/drawing/2014/main" id="{0944C571-FD34-435D-AE5E-597E132A5C43}"/>
-              </a:ext>
-            </a:extLst>
-          </p:cNvPr>
-          <p:cNvSpPr>
-            <a:spLocks xmlns:a="http://schemas.openxmlformats.org/drawingml/2006/main" noGrp="1"/>
-          </p:cNvSpPr>
-          <p:nvPr/>
-        </p:nvSpPr>
-        <p:spPr>
-          <a:xfrm xmlns:a="http://schemas.openxmlformats.org/drawingml/2006/main">
-            <a:off x="1000125" y="2276475"/>
-            <a:ext cx="476250" cy="419100"/>
+                <a16:creationId xmlns:a16="http://schemas.microsoft.com/office/drawing/2014/main" id="{0F4C5262-969B-4623-9A95-88BFE0AD138C}"/>
+              </a:ext>
+            </a:extLst>
+          </p:cNvPr>
+          <p:cNvSpPr>
+            <a:spLocks xmlns:a="http://schemas.openxmlformats.org/drawingml/2006/main" noGrp="1"/>
+          </p:cNvSpPr>
+          <p:nvPr/>
+        </p:nvSpPr>
+        <p:spPr>
+          <a:xfrm xmlns:a="http://schemas.openxmlformats.org/drawingml/2006/main">
+            <a:off x="1162050" y="2200275"/>
+            <a:ext cx="400050" cy="400050"/>
           </a:xfrm>
           <a:prstGeom xmlns:a="http://schemas.openxmlformats.org/drawingml/2006/main" prst="rect">
             <a:avLst/>
@@ -8326,9 +8328,9 @@
           <a:lstStyle xmlns:a="http://schemas.openxmlformats.org/drawingml/2006/main"/>
           <a:p xmlns:a="http://schemas.openxmlformats.org/drawingml/2006/main">
             <a:pPr algn="ctr">
-              <a:defRPr sz="1350" b="1">
-                <a:solidFill>
-                  <a:srgbClr val="FFFFFF"/>
+              <a:defRPr sz="1125" b="1">
+                <a:solidFill>
+                  <a:srgbClr val="2C6E73"/>
                 </a:solidFill>
                 <a:latin typeface="Arial"/>
                 <a:ea typeface="Arial"/>
@@ -8336,9 +8338,9 @@
               </a:defRPr>
             </a:pPr>
             <a:r>
-              <a:rPr sz="1350" b="1">
-                <a:solidFill>
-                  <a:srgbClr val="FFFFFF"/>
+              <a:rPr sz="1125" b="1">
+                <a:solidFill>
+                  <a:srgbClr val="2C6E73"/>
                 </a:solidFill>
                 <a:latin typeface="Arial"/>
                 <a:ea typeface="Arial"/>
@@ -8354,19 +8356,19 @@
           <p:cNvPr id="13" name="">
             <a:extLst xmlns:a="http://schemas.openxmlformats.org/drawingml/2006/main">
               <a:ext uri="{FF2B5EF4-FFF2-40B4-BE49-F238E27FC236}">
-                <a16:creationId xmlns:a16="http://schemas.microsoft.com/office/drawing/2014/main" id="{3FA7E358-E609-4C2F-A666-62598725C418}"/>
-              </a:ext>
-            </a:extLst>
-          </p:cNvPr>
-          <p:cNvSpPr>
-            <a:spLocks xmlns:a="http://schemas.openxmlformats.org/drawingml/2006/main" noGrp="1"/>
-          </p:cNvSpPr>
-          <p:nvPr/>
-        </p:nvSpPr>
-        <p:spPr>
-          <a:xfrm xmlns:a="http://schemas.openxmlformats.org/drawingml/2006/main">
-            <a:off x="1714500" y="2181225"/>
-            <a:ext cx="9429750" cy="609600"/>
+                <a16:creationId xmlns:a16="http://schemas.microsoft.com/office/drawing/2014/main" id="{E57B14EE-0389-4A4E-A3F0-FA98C96251D4}"/>
+              </a:ext>
+            </a:extLst>
+          </p:cNvPr>
+          <p:cNvSpPr>
+            <a:spLocks xmlns:a="http://schemas.openxmlformats.org/drawingml/2006/main" noGrp="1"/>
+          </p:cNvSpPr>
+          <p:nvPr/>
+        </p:nvSpPr>
+        <p:spPr>
+          <a:xfrm xmlns:a="http://schemas.openxmlformats.org/drawingml/2006/main">
+            <a:off x="1714500" y="2114550"/>
+            <a:ext cx="9525000" cy="809625"/>
           </a:xfrm>
           <a:prstGeom xmlns:a="http://schemas.openxmlformats.org/drawingml/2006/main" prst="rect">
             <a:avLst/>
@@ -8383,7 +8385,7 @@
           <a:lstStyle xmlns:a="http://schemas.openxmlformats.org/drawingml/2006/main"/>
           <a:p xmlns:a="http://schemas.openxmlformats.org/drawingml/2006/main">
             <a:pPr algn="l">
-              <a:defRPr sz="1500" b="0">
+              <a:defRPr sz="1725" b="0">
                 <a:solidFill>
                   <a:srgbClr val="17253A"/>
                 </a:solidFill>
@@ -8393,7 +8395,7 @@
               </a:defRPr>
             </a:pPr>
             <a:r>
-              <a:rPr sz="1500" b="0">
+              <a:rPr sz="1725" b="0">
                 <a:solidFill>
                   <a:srgbClr val="17253A"/>
                 </a:solidFill>
@@ -8401,7 +8403,7 @@
                 <a:ea typeface="Arial"/>
                 <a:cs typeface="Arial"/>
               </a:rPr>
-              <a:t>Identify the structure: Identify the goal, constraints and useful information before calculating.</a:t>
+              <a:t>126° represents 42 pupils</a:t>
             </a:r>
           </a:p>
         </p:txBody>
@@ -8411,28 +8413,30 @@
           <p:cNvPr id="14" name="">
             <a:extLst xmlns:a="http://schemas.openxmlformats.org/drawingml/2006/main">
               <a:ext uri="{FF2B5EF4-FFF2-40B4-BE49-F238E27FC236}">
-                <a16:creationId xmlns:a16="http://schemas.microsoft.com/office/drawing/2014/main" id="{E561473F-BA3F-46DB-A1F2-5AEFBC2ECA8B}"/>
-              </a:ext>
-            </a:extLst>
-          </p:cNvPr>
-          <p:cNvSpPr>
-            <a:spLocks xmlns:a="http://schemas.openxmlformats.org/drawingml/2006/main" noGrp="1"/>
-          </p:cNvSpPr>
-          <p:nvPr/>
-        </p:nvSpPr>
-        <p:spPr>
-          <a:xfrm xmlns:a="http://schemas.openxmlformats.org/drawingml/2006/main">
-            <a:off x="1000125" y="2990850"/>
-            <a:ext cx="476250" cy="476250"/>
-          </a:xfrm>
-          <a:prstGeom xmlns:a="http://schemas.openxmlformats.org/drawingml/2006/main" prst="ellipse">
+                <a16:creationId xmlns:a16="http://schemas.microsoft.com/office/drawing/2014/main" id="{449F5161-04B4-4234-B0AC-5B44B350B10A}"/>
+              </a:ext>
+            </a:extLst>
+          </p:cNvPr>
+          <p:cNvSpPr>
+            <a:spLocks xmlns:a="http://schemas.openxmlformats.org/drawingml/2006/main" noGrp="1"/>
+          </p:cNvSpPr>
+          <p:nvPr/>
+        </p:nvSpPr>
+        <p:spPr>
+          <a:xfrm xmlns:a="http://schemas.openxmlformats.org/drawingml/2006/main">
+            <a:off x="1714500" y="2943225"/>
+            <a:ext cx="9334500" cy="9525"/>
+          </a:xfrm>
+          <a:prstGeom xmlns:a="http://schemas.openxmlformats.org/drawingml/2006/main" prst="rect">
             <a:avLst/>
           </a:prstGeom>
           <a:solidFill xmlns:a="http://schemas.openxmlformats.org/drawingml/2006/main">
-            <a:srgbClr val="2C6E73"/>
+            <a:srgbClr val="D9E0E6"/>
           </a:solidFill>
           <a:ln xmlns:a="http://schemas.openxmlformats.org/drawingml/2006/main" w="0">
-            <a:noFill/>
+            <a:solidFill>
+              <a:srgbClr val="D9E0E6"/>
+            </a:solidFill>
           </a:ln>
         </p:spPr>
       </p:sp>
@@ -8441,19 +8445,19 @@
           <p:cNvPr id="15" name="">
             <a:extLst xmlns:a="http://schemas.openxmlformats.org/drawingml/2006/main">
               <a:ext uri="{FF2B5EF4-FFF2-40B4-BE49-F238E27FC236}">
-                <a16:creationId xmlns:a16="http://schemas.microsoft.com/office/drawing/2014/main" id="{A1F24329-8B08-48B7-BABA-CFEEF46A9CE1}"/>
-              </a:ext>
-            </a:extLst>
-          </p:cNvPr>
-          <p:cNvSpPr>
-            <a:spLocks xmlns:a="http://schemas.openxmlformats.org/drawingml/2006/main" noGrp="1"/>
-          </p:cNvSpPr>
-          <p:nvPr/>
-        </p:nvSpPr>
-        <p:spPr>
-          <a:xfrm xmlns:a="http://schemas.openxmlformats.org/drawingml/2006/main">
-            <a:off x="1000125" y="3019425"/>
-            <a:ext cx="476250" cy="419100"/>
+                <a16:creationId xmlns:a16="http://schemas.microsoft.com/office/drawing/2014/main" id="{FFD30468-D8AE-4024-9C7F-FFF6E29A6F27}"/>
+              </a:ext>
+            </a:extLst>
+          </p:cNvPr>
+          <p:cNvSpPr>
+            <a:spLocks xmlns:a="http://schemas.openxmlformats.org/drawingml/2006/main" noGrp="1"/>
+          </p:cNvSpPr>
+          <p:nvPr/>
+        </p:nvSpPr>
+        <p:spPr>
+          <a:xfrm xmlns:a="http://schemas.openxmlformats.org/drawingml/2006/main">
+            <a:off x="1162050" y="3076575"/>
+            <a:ext cx="400050" cy="400050"/>
           </a:xfrm>
           <a:prstGeom xmlns:a="http://schemas.openxmlformats.org/drawingml/2006/main" prst="rect">
             <a:avLst/>
@@ -8470,9 +8474,9 @@
           <a:lstStyle xmlns:a="http://schemas.openxmlformats.org/drawingml/2006/main"/>
           <a:p xmlns:a="http://schemas.openxmlformats.org/drawingml/2006/main">
             <a:pPr algn="ctr">
-              <a:defRPr sz="1350" b="1">
-                <a:solidFill>
-                  <a:srgbClr val="FFFFFF"/>
+              <a:defRPr sz="1125" b="1">
+                <a:solidFill>
+                  <a:srgbClr val="2C6E73"/>
                 </a:solidFill>
                 <a:latin typeface="Arial"/>
                 <a:ea typeface="Arial"/>
@@ -8480,9 +8484,9 @@
               </a:defRPr>
             </a:pPr>
             <a:r>
-              <a:rPr sz="1350" b="1">
-                <a:solidFill>
-                  <a:srgbClr val="FFFFFF"/>
+              <a:rPr sz="1125" b="1">
+                <a:solidFill>
+                  <a:srgbClr val="2C6E73"/>
                 </a:solidFill>
                 <a:latin typeface="Arial"/>
                 <a:ea typeface="Arial"/>
@@ -8498,19 +8502,19 @@
           <p:cNvPr id="16" name="">
             <a:extLst xmlns:a="http://schemas.openxmlformats.org/drawingml/2006/main">
               <a:ext uri="{FF2B5EF4-FFF2-40B4-BE49-F238E27FC236}">
-                <a16:creationId xmlns:a16="http://schemas.microsoft.com/office/drawing/2014/main" id="{8775B9C9-7D47-4572-86DF-82A36556985A}"/>
-              </a:ext>
-            </a:extLst>
-          </p:cNvPr>
-          <p:cNvSpPr>
-            <a:spLocks xmlns:a="http://schemas.openxmlformats.org/drawingml/2006/main" noGrp="1"/>
-          </p:cNvSpPr>
-          <p:nvPr/>
-        </p:nvSpPr>
-        <p:spPr>
-          <a:xfrm xmlns:a="http://schemas.openxmlformats.org/drawingml/2006/main">
-            <a:off x="1714500" y="2924175"/>
-            <a:ext cx="9429750" cy="609600"/>
+                <a16:creationId xmlns:a16="http://schemas.microsoft.com/office/drawing/2014/main" id="{EEE85B66-E12C-48CC-89B6-5A8FB77E5A38}"/>
+              </a:ext>
+            </a:extLst>
+          </p:cNvPr>
+          <p:cNvSpPr>
+            <a:spLocks xmlns:a="http://schemas.openxmlformats.org/drawingml/2006/main" noGrp="1"/>
+          </p:cNvSpPr>
+          <p:nvPr/>
+        </p:nvSpPr>
+        <p:spPr>
+          <a:xfrm xmlns:a="http://schemas.openxmlformats.org/drawingml/2006/main">
+            <a:off x="1714500" y="2990850"/>
+            <a:ext cx="9525000" cy="809625"/>
           </a:xfrm>
           <a:prstGeom xmlns:a="http://schemas.openxmlformats.org/drawingml/2006/main" prst="rect">
             <a:avLst/>
@@ -8527,7 +8531,7 @@
           <a:lstStyle xmlns:a="http://schemas.openxmlformats.org/drawingml/2006/main"/>
           <a:p xmlns:a="http://schemas.openxmlformats.org/drawingml/2006/main">
             <a:pPr algn="l">
-              <a:defRPr sz="1500" b="0">
+              <a:defRPr sz="1725" b="0">
                 <a:solidFill>
                   <a:srgbClr val="17253A"/>
                 </a:solidFill>
@@ -8537,7 +8541,7 @@
               </a:defRPr>
             </a:pPr>
             <a:r>
-              <a:rPr sz="1500" b="0">
+              <a:rPr sz="1725" b="0">
                 <a:solidFill>
                   <a:srgbClr val="17253A"/>
                 </a:solidFill>
@@ -8545,7 +8549,7 @@
                 <a:ea typeface="Arial"/>
                 <a:cs typeface="Arial"/>
               </a:rPr>
-              <a:t>Set up the method: Choose a representation and complete each labelled step.</a:t>
+              <a:t>1 pupil represents 126° ÷ 42 = 3°</a:t>
             </a:r>
           </a:p>
         </p:txBody>
@@ -8555,28 +8559,30 @@
           <p:cNvPr id="17" name="">
             <a:extLst xmlns:a="http://schemas.openxmlformats.org/drawingml/2006/main">
               <a:ext uri="{FF2B5EF4-FFF2-40B4-BE49-F238E27FC236}">
-                <a16:creationId xmlns:a16="http://schemas.microsoft.com/office/drawing/2014/main" id="{D8F2D2FA-DC2C-48D4-A97A-26B85994BBD2}"/>
-              </a:ext>
-            </a:extLst>
-          </p:cNvPr>
-          <p:cNvSpPr>
-            <a:spLocks xmlns:a="http://schemas.openxmlformats.org/drawingml/2006/main" noGrp="1"/>
-          </p:cNvSpPr>
-          <p:nvPr/>
-        </p:nvSpPr>
-        <p:spPr>
-          <a:xfrm xmlns:a="http://schemas.openxmlformats.org/drawingml/2006/main">
-            <a:off x="1000125" y="3733800"/>
-            <a:ext cx="476250" cy="476250"/>
-          </a:xfrm>
-          <a:prstGeom xmlns:a="http://schemas.openxmlformats.org/drawingml/2006/main" prst="ellipse">
+                <a16:creationId xmlns:a16="http://schemas.microsoft.com/office/drawing/2014/main" id="{E21A67E5-91FD-4B65-8FE4-814FE92AD3B1}"/>
+              </a:ext>
+            </a:extLst>
+          </p:cNvPr>
+          <p:cNvSpPr>
+            <a:spLocks xmlns:a="http://schemas.openxmlformats.org/drawingml/2006/main" noGrp="1"/>
+          </p:cNvSpPr>
+          <p:nvPr/>
+        </p:nvSpPr>
+        <p:spPr>
+          <a:xfrm xmlns:a="http://schemas.openxmlformats.org/drawingml/2006/main">
+            <a:off x="1714500" y="3819525"/>
+            <a:ext cx="9334500" cy="9525"/>
+          </a:xfrm>
+          <a:prstGeom xmlns:a="http://schemas.openxmlformats.org/drawingml/2006/main" prst="rect">
             <a:avLst/>
           </a:prstGeom>
           <a:solidFill xmlns:a="http://schemas.openxmlformats.org/drawingml/2006/main">
-            <a:srgbClr val="2C6E73"/>
+            <a:srgbClr val="D9E0E6"/>
           </a:solidFill>
           <a:ln xmlns:a="http://schemas.openxmlformats.org/drawingml/2006/main" w="0">
-            <a:noFill/>
+            <a:solidFill>
+              <a:srgbClr val="D9E0E6"/>
+            </a:solidFill>
           </a:ln>
         </p:spPr>
       </p:sp>
@@ -8585,19 +8591,19 @@
           <p:cNvPr id="18" name="">
             <a:extLst xmlns:a="http://schemas.openxmlformats.org/drawingml/2006/main">
               <a:ext uri="{FF2B5EF4-FFF2-40B4-BE49-F238E27FC236}">
-                <a16:creationId xmlns:a16="http://schemas.microsoft.com/office/drawing/2014/main" id="{18C41922-4CFB-43AB-B4ED-7902A01FD6AB}"/>
-              </a:ext>
-            </a:extLst>
-          </p:cNvPr>
-          <p:cNvSpPr>
-            <a:spLocks xmlns:a="http://schemas.openxmlformats.org/drawingml/2006/main" noGrp="1"/>
-          </p:cNvSpPr>
-          <p:nvPr/>
-        </p:nvSpPr>
-        <p:spPr>
-          <a:xfrm xmlns:a="http://schemas.openxmlformats.org/drawingml/2006/main">
-            <a:off x="1000125" y="3762375"/>
-            <a:ext cx="476250" cy="419100"/>
+                <a16:creationId xmlns:a16="http://schemas.microsoft.com/office/drawing/2014/main" id="{88931B8B-4DC0-4F11-A64A-60BF9B9FD371}"/>
+              </a:ext>
+            </a:extLst>
+          </p:cNvPr>
+          <p:cNvSpPr>
+            <a:spLocks xmlns:a="http://schemas.openxmlformats.org/drawingml/2006/main" noGrp="1"/>
+          </p:cNvSpPr>
+          <p:nvPr/>
+        </p:nvSpPr>
+        <p:spPr>
+          <a:xfrm xmlns:a="http://schemas.openxmlformats.org/drawingml/2006/main">
+            <a:off x="1162050" y="3952875"/>
+            <a:ext cx="400050" cy="400050"/>
           </a:xfrm>
           <a:prstGeom xmlns:a="http://schemas.openxmlformats.org/drawingml/2006/main" prst="rect">
             <a:avLst/>
@@ -8614,9 +8620,9 @@
           <a:lstStyle xmlns:a="http://schemas.openxmlformats.org/drawingml/2006/main"/>
           <a:p xmlns:a="http://schemas.openxmlformats.org/drawingml/2006/main">
             <a:pPr algn="ctr">
-              <a:defRPr sz="1350" b="1">
-                <a:solidFill>
-                  <a:srgbClr val="FFFFFF"/>
+              <a:defRPr sz="1125" b="1">
+                <a:solidFill>
+                  <a:srgbClr val="2C6E73"/>
                 </a:solidFill>
                 <a:latin typeface="Arial"/>
                 <a:ea typeface="Arial"/>
@@ -8624,9 +8630,9 @@
               </a:defRPr>
             </a:pPr>
             <a:r>
-              <a:rPr sz="1350" b="1">
-                <a:solidFill>
-                  <a:srgbClr val="FFFFFF"/>
+              <a:rPr sz="1125" b="1">
+                <a:solidFill>
+                  <a:srgbClr val="2C6E73"/>
                 </a:solidFill>
                 <a:latin typeface="Arial"/>
                 <a:ea typeface="Arial"/>
@@ -8642,19 +8648,19 @@
           <p:cNvPr id="19" name="">
             <a:extLst xmlns:a="http://schemas.openxmlformats.org/drawingml/2006/main">
               <a:ext uri="{FF2B5EF4-FFF2-40B4-BE49-F238E27FC236}">
-                <a16:creationId xmlns:a16="http://schemas.microsoft.com/office/drawing/2014/main" id="{EB2FBDAC-8F5E-478D-8663-E32A968E7698}"/>
-              </a:ext>
-            </a:extLst>
-          </p:cNvPr>
-          <p:cNvSpPr>
-            <a:spLocks xmlns:a="http://schemas.openxmlformats.org/drawingml/2006/main" noGrp="1"/>
-          </p:cNvSpPr>
-          <p:nvPr/>
-        </p:nvSpPr>
-        <p:spPr>
-          <a:xfrm xmlns:a="http://schemas.openxmlformats.org/drawingml/2006/main">
-            <a:off x="1714500" y="3667125"/>
-            <a:ext cx="9429750" cy="609600"/>
+                <a16:creationId xmlns:a16="http://schemas.microsoft.com/office/drawing/2014/main" id="{06208927-3259-44E8-B2A0-F7BC59D185B4}"/>
+              </a:ext>
+            </a:extLst>
+          </p:cNvPr>
+          <p:cNvSpPr>
+            <a:spLocks xmlns:a="http://schemas.openxmlformats.org/drawingml/2006/main" noGrp="1"/>
+          </p:cNvSpPr>
+          <p:nvPr/>
+        </p:nvSpPr>
+        <p:spPr>
+          <a:xfrm xmlns:a="http://schemas.openxmlformats.org/drawingml/2006/main">
+            <a:off x="1714500" y="3867150"/>
+            <a:ext cx="9525000" cy="809625"/>
           </a:xfrm>
           <a:prstGeom xmlns:a="http://schemas.openxmlformats.org/drawingml/2006/main" prst="rect">
             <a:avLst/>
@@ -8671,7 +8677,7 @@
           <a:lstStyle xmlns:a="http://schemas.openxmlformats.org/drawingml/2006/main"/>
           <a:p xmlns:a="http://schemas.openxmlformats.org/drawingml/2006/main">
             <a:pPr algn="l">
-              <a:defRPr sz="1500" b="0">
+              <a:defRPr sz="1725" b="0">
                 <a:solidFill>
                   <a:srgbClr val="17253A"/>
                 </a:solidFill>
@@ -8681,7 +8687,7 @@
               </a:defRPr>
             </a:pPr>
             <a:r>
-              <a:rPr sz="1500" b="0">
+              <a:rPr sz="1725" b="0">
                 <a:solidFill>
                   <a:srgbClr val="17253A"/>
                 </a:solidFill>
@@ -8689,7 +8695,7 @@
                 <a:ea typeface="Arial"/>
                 <a:cs typeface="Arial"/>
               </a:rPr>
-              <a:t>Complete the calculation: 120 pupils.</a:t>
+              <a:t>Whole circle = 360°</a:t>
             </a:r>
           </a:p>
         </p:txBody>
@@ -8699,28 +8705,30 @@
           <p:cNvPr id="20" name="">
             <a:extLst xmlns:a="http://schemas.openxmlformats.org/drawingml/2006/main">
               <a:ext uri="{FF2B5EF4-FFF2-40B4-BE49-F238E27FC236}">
-                <a16:creationId xmlns:a16="http://schemas.microsoft.com/office/drawing/2014/main" id="{9E8CE52B-EB84-4152-9890-8CD389E789DC}"/>
-              </a:ext>
-            </a:extLst>
-          </p:cNvPr>
-          <p:cNvSpPr>
-            <a:spLocks xmlns:a="http://schemas.openxmlformats.org/drawingml/2006/main" noGrp="1"/>
-          </p:cNvSpPr>
-          <p:nvPr/>
-        </p:nvSpPr>
-        <p:spPr>
-          <a:xfrm xmlns:a="http://schemas.openxmlformats.org/drawingml/2006/main">
-            <a:off x="1000125" y="4476750"/>
-            <a:ext cx="476250" cy="476250"/>
-          </a:xfrm>
-          <a:prstGeom xmlns:a="http://schemas.openxmlformats.org/drawingml/2006/main" prst="ellipse">
+                <a16:creationId xmlns:a16="http://schemas.microsoft.com/office/drawing/2014/main" id="{6D32B790-46F3-40B4-A2D3-8AA94D55113D}"/>
+              </a:ext>
+            </a:extLst>
+          </p:cNvPr>
+          <p:cNvSpPr>
+            <a:spLocks xmlns:a="http://schemas.openxmlformats.org/drawingml/2006/main" noGrp="1"/>
+          </p:cNvSpPr>
+          <p:nvPr/>
+        </p:nvSpPr>
+        <p:spPr>
+          <a:xfrm xmlns:a="http://schemas.openxmlformats.org/drawingml/2006/main">
+            <a:off x="1714500" y="4695825"/>
+            <a:ext cx="9334500" cy="9525"/>
+          </a:xfrm>
+          <a:prstGeom xmlns:a="http://schemas.openxmlformats.org/drawingml/2006/main" prst="rect">
             <a:avLst/>
           </a:prstGeom>
           <a:solidFill xmlns:a="http://schemas.openxmlformats.org/drawingml/2006/main">
-            <a:srgbClr val="2C6E73"/>
+            <a:srgbClr val="D9E0E6"/>
           </a:solidFill>
           <a:ln xmlns:a="http://schemas.openxmlformats.org/drawingml/2006/main" w="0">
-            <a:noFill/>
+            <a:solidFill>
+              <a:srgbClr val="D9E0E6"/>
+            </a:solidFill>
           </a:ln>
         </p:spPr>
       </p:sp>
@@ -8729,19 +8737,19 @@
           <p:cNvPr id="21" name="">
             <a:extLst xmlns:a="http://schemas.openxmlformats.org/drawingml/2006/main">
               <a:ext uri="{FF2B5EF4-FFF2-40B4-BE49-F238E27FC236}">
-                <a16:creationId xmlns:a16="http://schemas.microsoft.com/office/drawing/2014/main" id="{E3FBF357-F2E7-4C63-8FC6-B29B2C863C52}"/>
-              </a:ext>
-            </a:extLst>
-          </p:cNvPr>
-          <p:cNvSpPr>
-            <a:spLocks xmlns:a="http://schemas.openxmlformats.org/drawingml/2006/main" noGrp="1"/>
-          </p:cNvSpPr>
-          <p:nvPr/>
-        </p:nvSpPr>
-        <p:spPr>
-          <a:xfrm xmlns:a="http://schemas.openxmlformats.org/drawingml/2006/main">
-            <a:off x="1000125" y="4505325"/>
-            <a:ext cx="476250" cy="419100"/>
+                <a16:creationId xmlns:a16="http://schemas.microsoft.com/office/drawing/2014/main" id="{5CE4CEFB-1321-4360-A7BF-97F422C0604F}"/>
+              </a:ext>
+            </a:extLst>
+          </p:cNvPr>
+          <p:cNvSpPr>
+            <a:spLocks xmlns:a="http://schemas.openxmlformats.org/drawingml/2006/main" noGrp="1"/>
+          </p:cNvSpPr>
+          <p:nvPr/>
+        </p:nvSpPr>
+        <p:spPr>
+          <a:xfrm xmlns:a="http://schemas.openxmlformats.org/drawingml/2006/main">
+            <a:off x="1162050" y="4829175"/>
+            <a:ext cx="400050" cy="400050"/>
           </a:xfrm>
           <a:prstGeom xmlns:a="http://schemas.openxmlformats.org/drawingml/2006/main" prst="rect">
             <a:avLst/>
@@ -8758,9 +8766,9 @@
           <a:lstStyle xmlns:a="http://schemas.openxmlformats.org/drawingml/2006/main"/>
           <a:p xmlns:a="http://schemas.openxmlformats.org/drawingml/2006/main">
             <a:pPr algn="ctr">
-              <a:defRPr sz="1350" b="1">
-                <a:solidFill>
-                  <a:srgbClr val="FFFFFF"/>
+              <a:defRPr sz="1125" b="1">
+                <a:solidFill>
+                  <a:srgbClr val="2F785D"/>
                 </a:solidFill>
                 <a:latin typeface="Arial"/>
                 <a:ea typeface="Arial"/>
@@ -8768,9 +8776,9 @@
               </a:defRPr>
             </a:pPr>
             <a:r>
-              <a:rPr sz="1350" b="1">
-                <a:solidFill>
-                  <a:srgbClr val="FFFFFF"/>
+              <a:rPr sz="1125" b="1">
+                <a:solidFill>
+                  <a:srgbClr val="2F785D"/>
                 </a:solidFill>
                 <a:latin typeface="Arial"/>
                 <a:ea typeface="Arial"/>
@@ -8786,19 +8794,19 @@
           <p:cNvPr id="22" name="">
             <a:extLst xmlns:a="http://schemas.openxmlformats.org/drawingml/2006/main">
               <a:ext uri="{FF2B5EF4-FFF2-40B4-BE49-F238E27FC236}">
-                <a16:creationId xmlns:a16="http://schemas.microsoft.com/office/drawing/2014/main" id="{BC3052BB-D88A-4A84-8AA7-21BB7872CA5E}"/>
-              </a:ext>
-            </a:extLst>
-          </p:cNvPr>
-          <p:cNvSpPr>
-            <a:spLocks xmlns:a="http://schemas.openxmlformats.org/drawingml/2006/main" noGrp="1"/>
-          </p:cNvSpPr>
-          <p:nvPr/>
-        </p:nvSpPr>
-        <p:spPr>
-          <a:xfrm xmlns:a="http://schemas.openxmlformats.org/drawingml/2006/main">
-            <a:off x="1714500" y="4410075"/>
-            <a:ext cx="9429750" cy="609600"/>
+                <a16:creationId xmlns:a16="http://schemas.microsoft.com/office/drawing/2014/main" id="{5E244AA7-EAC6-446C-A9A0-89CB9052F0FD}"/>
+              </a:ext>
+            </a:extLst>
+          </p:cNvPr>
+          <p:cNvSpPr>
+            <a:spLocks xmlns:a="http://schemas.openxmlformats.org/drawingml/2006/main" noGrp="1"/>
+          </p:cNvSpPr>
+          <p:nvPr/>
+        </p:nvSpPr>
+        <p:spPr>
+          <a:xfrm xmlns:a="http://schemas.openxmlformats.org/drawingml/2006/main">
+            <a:off x="1714500" y="4743450"/>
+            <a:ext cx="9525000" cy="809625"/>
           </a:xfrm>
           <a:prstGeom xmlns:a="http://schemas.openxmlformats.org/drawingml/2006/main" prst="rect">
             <a:avLst/>
@@ -8815,7 +8823,7 @@
           <a:lstStyle xmlns:a="http://schemas.openxmlformats.org/drawingml/2006/main"/>
           <a:p xmlns:a="http://schemas.openxmlformats.org/drawingml/2006/main">
             <a:pPr algn="l">
-              <a:defRPr sz="1500" b="1">
+              <a:defRPr sz="1725" b="1">
                 <a:solidFill>
                   <a:srgbClr val="2F785D"/>
                 </a:solidFill>
@@ -8825,7 +8833,7 @@
               </a:defRPr>
             </a:pPr>
             <a:r>
-              <a:rPr sz="1500" b="1">
+              <a:rPr sz="1725" b="1">
                 <a:solidFill>
                   <a:srgbClr val="2F785D"/>
                 </a:solidFill>
@@ -8833,7 +8841,7 @@
                 <a:ea typeface="Arial"/>
                 <a:cs typeface="Arial"/>
               </a:rPr>
-              <a:t>Check the result: Check the solution and explain why it satisfies every condition.</a:t>
+              <a:t>360° ÷ 3° = 120 pupils</a:t>
             </a:r>
           </a:p>
         </p:txBody>
@@ -8841,7 +8849,7 @@
     </p:spTree>
     <p:extLst>
       <p:ext uri="{BB962C8B-B14F-4D97-AF65-F5344CB8AC3E}">
-        <p14:creationId xmlns:p14="http://schemas.microsoft.com/office/powerpoint/2010/main" val="1682983721"/>
+        <p14:creationId xmlns:p14="http://schemas.microsoft.com/office/powerpoint/2010/main" val="1580415459"/>
       </p:ext>
     </p:extLst>
   </p:cSld>
@@ -9134,7 +9142,7 @@
           <p:cNvPr id="15" name="">
             <a:extLst xmlns:a="http://schemas.openxmlformats.org/drawingml/2006/main">
               <a:ext uri="{FF2B5EF4-FFF2-40B4-BE49-F238E27FC236}">
-                <a16:creationId xmlns:a16="http://schemas.microsoft.com/office/drawing/2014/main" id="{46937FB7-B657-4E02-8551-6B9A2CFAB8CF}"/>
+                <a16:creationId xmlns:a16="http://schemas.microsoft.com/office/drawing/2014/main" id="{9D2AD2E3-EAF7-41E3-A7B4-12A647FDF25B}"/>
               </a:ext>
             </a:extLst>
           </p:cNvPr>
@@ -9166,7 +9174,7 @@
           <p:cNvPr id="2" name="">
             <a:extLst xmlns:a="http://schemas.openxmlformats.org/drawingml/2006/main">
               <a:ext uri="{FF2B5EF4-FFF2-40B4-BE49-F238E27FC236}">
-                <a16:creationId xmlns:a16="http://schemas.microsoft.com/office/drawing/2014/main" id="{91EED345-FDBB-40C8-8D1D-B9D5DCBF4B6A}"/>
+                <a16:creationId xmlns:a16="http://schemas.microsoft.com/office/drawing/2014/main" id="{178564B4-6481-417F-8E3E-909C1F09D441}"/>
               </a:ext>
             </a:extLst>
           </p:cNvPr>
@@ -9223,7 +9231,7 @@
           <p:cNvPr id="3" name="">
             <a:extLst xmlns:a="http://schemas.openxmlformats.org/drawingml/2006/main">
               <a:ext uri="{FF2B5EF4-FFF2-40B4-BE49-F238E27FC236}">
-                <a16:creationId xmlns:a16="http://schemas.microsoft.com/office/drawing/2014/main" id="{78AC873F-56BA-4D15-BA34-BFD286175FD2}"/>
+                <a16:creationId xmlns:a16="http://schemas.microsoft.com/office/drawing/2014/main" id="{9D5F22DF-FB33-454C-B0D5-5BDE8B1118CF}"/>
               </a:ext>
             </a:extLst>
           </p:cNvPr>
@@ -9255,7 +9263,7 @@
           <p:cNvPr id="4" name="">
             <a:extLst xmlns:a="http://schemas.openxmlformats.org/drawingml/2006/main">
               <a:ext uri="{FF2B5EF4-FFF2-40B4-BE49-F238E27FC236}">
-                <a16:creationId xmlns:a16="http://schemas.microsoft.com/office/drawing/2014/main" id="{A35079FF-B683-4951-AF89-FE11C5A867F0}"/>
+                <a16:creationId xmlns:a16="http://schemas.microsoft.com/office/drawing/2014/main" id="{A20F3FB4-D6A4-4482-98CA-FA7FF08CF601}"/>
               </a:ext>
             </a:extLst>
           </p:cNvPr>
@@ -9312,7 +9320,7 @@
           <p:cNvPr id="5" name="">
             <a:extLst xmlns:a="http://schemas.openxmlformats.org/drawingml/2006/main">
               <a:ext uri="{FF2B5EF4-FFF2-40B4-BE49-F238E27FC236}">
-                <a16:creationId xmlns:a16="http://schemas.microsoft.com/office/drawing/2014/main" id="{8FCCC7AB-3CDE-4EAA-9722-FC68DF20D81F}"/>
+                <a16:creationId xmlns:a16="http://schemas.microsoft.com/office/drawing/2014/main" id="{DF13F908-6856-4615-82AC-512C014041CA}"/>
               </a:ext>
             </a:extLst>
           </p:cNvPr>
@@ -9369,7 +9377,7 @@
           <p:cNvPr id="6" name="">
             <a:extLst xmlns:a="http://schemas.openxmlformats.org/drawingml/2006/main">
               <a:ext uri="{FF2B5EF4-FFF2-40B4-BE49-F238E27FC236}">
-                <a16:creationId xmlns:a16="http://schemas.microsoft.com/office/drawing/2014/main" id="{15CE17A3-39A2-47E1-9247-B261518BD8C5}"/>
+                <a16:creationId xmlns:a16="http://schemas.microsoft.com/office/drawing/2014/main" id="{2B803AB0-D10C-43A3-B19B-88306D4A25AC}"/>
               </a:ext>
             </a:extLst>
           </p:cNvPr>
@@ -9426,7 +9434,7 @@
           <p:cNvPr id="7" name="">
             <a:extLst xmlns:a="http://schemas.openxmlformats.org/drawingml/2006/main">
               <a:ext uri="{FF2B5EF4-FFF2-40B4-BE49-F238E27FC236}">
-                <a16:creationId xmlns:a16="http://schemas.microsoft.com/office/drawing/2014/main" id="{AFBB5324-87EE-43DE-9767-D3D2EAB497F0}"/>
+                <a16:creationId xmlns:a16="http://schemas.microsoft.com/office/drawing/2014/main" id="{37521D72-0756-4B7C-92A8-03AA2A0579FC}"/>
               </a:ext>
             </a:extLst>
           </p:cNvPr>
@@ -9458,7 +9466,7 @@
           <p:cNvPr id="8" name="">
             <a:extLst xmlns:a="http://schemas.openxmlformats.org/drawingml/2006/main">
               <a:ext uri="{FF2B5EF4-FFF2-40B4-BE49-F238E27FC236}">
-                <a16:creationId xmlns:a16="http://schemas.microsoft.com/office/drawing/2014/main" id="{8BED9BF9-BC60-476B-88E5-C9B41062352C}"/>
+                <a16:creationId xmlns:a16="http://schemas.microsoft.com/office/drawing/2014/main" id="{391390EA-705E-4745-A647-40D2CFE4F77D}"/>
               </a:ext>
             </a:extLst>
           </p:cNvPr>
@@ -9515,7 +9523,7 @@
           <p:cNvPr id="9" name="">
             <a:extLst xmlns:a="http://schemas.openxmlformats.org/drawingml/2006/main">
               <a:ext uri="{FF2B5EF4-FFF2-40B4-BE49-F238E27FC236}">
-                <a16:creationId xmlns:a16="http://schemas.microsoft.com/office/drawing/2014/main" id="{3ED0558B-7BF6-4097-994C-3793A6288ABD}"/>
+                <a16:creationId xmlns:a16="http://schemas.microsoft.com/office/drawing/2014/main" id="{5CC905FD-BBB6-47C4-A22C-F92E39E353DB}"/>
               </a:ext>
             </a:extLst>
           </p:cNvPr>
@@ -9572,7 +9580,7 @@
           <p:cNvPr id="10" name="">
             <a:extLst xmlns:a="http://schemas.openxmlformats.org/drawingml/2006/main">
               <a:ext uri="{FF2B5EF4-FFF2-40B4-BE49-F238E27FC236}">
-                <a16:creationId xmlns:a16="http://schemas.microsoft.com/office/drawing/2014/main" id="{C7DA087E-72ED-46CC-BFF3-BAD76DBC1EAB}"/>
+                <a16:creationId xmlns:a16="http://schemas.microsoft.com/office/drawing/2014/main" id="{DF1B3346-AA99-4EB8-8356-208B437EC927}"/>
               </a:ext>
             </a:extLst>
           </p:cNvPr>
@@ -9629,7 +9637,7 @@
           <p:cNvPr id="11" name="">
             <a:extLst xmlns:a="http://schemas.openxmlformats.org/drawingml/2006/main">
               <a:ext uri="{FF2B5EF4-FFF2-40B4-BE49-F238E27FC236}">
-                <a16:creationId xmlns:a16="http://schemas.microsoft.com/office/drawing/2014/main" id="{88036083-BC42-45E2-9A97-9F1FB3505919}"/>
+                <a16:creationId xmlns:a16="http://schemas.microsoft.com/office/drawing/2014/main" id="{2D80EE91-1AE7-46B6-83C7-7C284A5989CE}"/>
               </a:ext>
             </a:extLst>
           </p:cNvPr>
@@ -9686,7 +9694,7 @@
           <p:cNvPr id="12" name="">
             <a:extLst xmlns:a="http://schemas.openxmlformats.org/drawingml/2006/main">
               <a:ext uri="{FF2B5EF4-FFF2-40B4-BE49-F238E27FC236}">
-                <a16:creationId xmlns:a16="http://schemas.microsoft.com/office/drawing/2014/main" id="{3E5EF106-1F63-4A9A-9093-A3670EC329FB}"/>
+                <a16:creationId xmlns:a16="http://schemas.microsoft.com/office/drawing/2014/main" id="{2302E239-2BE0-4493-9968-1BC810866646}"/>
               </a:ext>
             </a:extLst>
           </p:cNvPr>
@@ -9718,7 +9726,7 @@
           <p:cNvPr id="13" name="">
             <a:extLst xmlns:a="http://schemas.openxmlformats.org/drawingml/2006/main">
               <a:ext uri="{FF2B5EF4-FFF2-40B4-BE49-F238E27FC236}">
-                <a16:creationId xmlns:a16="http://schemas.microsoft.com/office/drawing/2014/main" id="{9AC107AD-723A-4E32-B007-7FC0265F1981}"/>
+                <a16:creationId xmlns:a16="http://schemas.microsoft.com/office/drawing/2014/main" id="{EAEB365E-5696-434C-96B2-1D6ADA3F239D}"/>
               </a:ext>
             </a:extLst>
           </p:cNvPr>
@@ -9775,7 +9783,7 @@
           <p:cNvPr id="14" name="">
             <a:extLst xmlns:a="http://schemas.openxmlformats.org/drawingml/2006/main">
               <a:ext uri="{FF2B5EF4-FFF2-40B4-BE49-F238E27FC236}">
-                <a16:creationId xmlns:a16="http://schemas.microsoft.com/office/drawing/2014/main" id="{3D371062-11E3-4377-A233-331A0F5DEE5C}"/>
+                <a16:creationId xmlns:a16="http://schemas.microsoft.com/office/drawing/2014/main" id="{8906028E-F70F-4DCD-AB40-3A98D0D6A578}"/>
               </a:ext>
             </a:extLst>
           </p:cNvPr>
@@ -9830,7 +9838,7 @@
     </p:spTree>
     <p:extLst>
       <p:ext uri="{BB962C8B-B14F-4D97-AF65-F5344CB8AC3E}">
-        <p14:creationId xmlns:p14="http://schemas.microsoft.com/office/powerpoint/2010/main" val="1933964416"/>
+        <p14:creationId xmlns:p14="http://schemas.microsoft.com/office/powerpoint/2010/main" val="324921762"/>
       </p:ext>
     </p:extLst>
   </p:cSld>
@@ -10031,7 +10039,7 @@
           <p:cNvPr id="16" name="">
             <a:extLst xmlns:a="http://schemas.openxmlformats.org/drawingml/2006/main">
               <a:ext uri="{FF2B5EF4-FFF2-40B4-BE49-F238E27FC236}">
-                <a16:creationId xmlns:a16="http://schemas.microsoft.com/office/drawing/2014/main" id="{02B2FD38-F01D-429E-8850-D75C3B6EEF46}"/>
+                <a16:creationId xmlns:a16="http://schemas.microsoft.com/office/drawing/2014/main" id="{6F288674-83DE-41EE-8A3F-4F6EBCA97E4A}"/>
               </a:ext>
             </a:extLst>
           </p:cNvPr>
@@ -10063,7 +10071,7 @@
           <p:cNvPr id="2" name="">
             <a:extLst xmlns:a="http://schemas.openxmlformats.org/drawingml/2006/main">
               <a:ext uri="{FF2B5EF4-FFF2-40B4-BE49-F238E27FC236}">
-                <a16:creationId xmlns:a16="http://schemas.microsoft.com/office/drawing/2014/main" id="{DDB5B9AA-CABF-472B-8405-386A35C7D0B3}"/>
+                <a16:creationId xmlns:a16="http://schemas.microsoft.com/office/drawing/2014/main" id="{C169A2E5-3228-4FE0-992F-CA3A42FB60D5}"/>
               </a:ext>
             </a:extLst>
           </p:cNvPr>
@@ -10120,7 +10128,7 @@
           <p:cNvPr id="3" name="">
             <a:extLst xmlns:a="http://schemas.openxmlformats.org/drawingml/2006/main">
               <a:ext uri="{FF2B5EF4-FFF2-40B4-BE49-F238E27FC236}">
-                <a16:creationId xmlns:a16="http://schemas.microsoft.com/office/drawing/2014/main" id="{8A476106-2E04-4282-B06C-1FAA8189DA8D}"/>
+                <a16:creationId xmlns:a16="http://schemas.microsoft.com/office/drawing/2014/main" id="{51CC2EBD-94F4-4F75-8DBB-18E709FAB6FB}"/>
               </a:ext>
             </a:extLst>
           </p:cNvPr>
@@ -10152,7 +10160,7 @@
           <p:cNvPr id="4" name="">
             <a:extLst xmlns:a="http://schemas.openxmlformats.org/drawingml/2006/main">
               <a:ext uri="{FF2B5EF4-FFF2-40B4-BE49-F238E27FC236}">
-                <a16:creationId xmlns:a16="http://schemas.microsoft.com/office/drawing/2014/main" id="{CFE215B8-0833-4414-85F0-20D7B29AD630}"/>
+                <a16:creationId xmlns:a16="http://schemas.microsoft.com/office/drawing/2014/main" id="{EF6AEDC5-5D54-498A-B270-2E3E2C9C7644}"/>
               </a:ext>
             </a:extLst>
           </p:cNvPr>
@@ -10209,7 +10217,7 @@
           <p:cNvPr id="5" name="">
             <a:extLst xmlns:a="http://schemas.openxmlformats.org/drawingml/2006/main">
               <a:ext uri="{FF2B5EF4-FFF2-40B4-BE49-F238E27FC236}">
-                <a16:creationId xmlns:a16="http://schemas.microsoft.com/office/drawing/2014/main" id="{DE65FA2E-56D8-4673-9C8D-AAD068C28568}"/>
+                <a16:creationId xmlns:a16="http://schemas.microsoft.com/office/drawing/2014/main" id="{1BDAE4AD-205E-4E76-8B7B-766C9DB84AE9}"/>
               </a:ext>
             </a:extLst>
           </p:cNvPr>
@@ -10266,7 +10274,7 @@
           <p:cNvPr id="6" name="">
             <a:extLst xmlns:a="http://schemas.openxmlformats.org/drawingml/2006/main">
               <a:ext uri="{FF2B5EF4-FFF2-40B4-BE49-F238E27FC236}">
-                <a16:creationId xmlns:a16="http://schemas.microsoft.com/office/drawing/2014/main" id="{D44FFA1A-2F2F-4573-9676-948B9511B318}"/>
+                <a16:creationId xmlns:a16="http://schemas.microsoft.com/office/drawing/2014/main" id="{1BB45282-D8ED-4D5E-AFB3-9F88C5A68841}"/>
               </a:ext>
             </a:extLst>
           </p:cNvPr>
@@ -10323,7 +10331,7 @@
           <p:cNvPr id="7" name="">
             <a:extLst xmlns:a="http://schemas.openxmlformats.org/drawingml/2006/main">
               <a:ext uri="{FF2B5EF4-FFF2-40B4-BE49-F238E27FC236}">
-                <a16:creationId xmlns:a16="http://schemas.microsoft.com/office/drawing/2014/main" id="{1DD112F7-C2E6-4CA4-9C7E-1FAAD9CAB170}"/>
+                <a16:creationId xmlns:a16="http://schemas.microsoft.com/office/drawing/2014/main" id="{818251AA-FCD3-4554-BA18-AABD30FF099D}"/>
               </a:ext>
             </a:extLst>
           </p:cNvPr>
@@ -10355,7 +10363,7 @@
           <p:cNvPr id="8" name="">
             <a:extLst xmlns:a="http://schemas.openxmlformats.org/drawingml/2006/main">
               <a:ext uri="{FF2B5EF4-FFF2-40B4-BE49-F238E27FC236}">
-                <a16:creationId xmlns:a16="http://schemas.microsoft.com/office/drawing/2014/main" id="{CC67F6A2-1EB7-4CBF-9FAC-741470AC25D8}"/>
+                <a16:creationId xmlns:a16="http://schemas.microsoft.com/office/drawing/2014/main" id="{47698C42-4B28-46B5-96DF-FCBA6AD6EEBC}"/>
               </a:ext>
             </a:extLst>
           </p:cNvPr>
@@ -10412,7 +10420,7 @@
           <p:cNvPr id="9" name="">
             <a:extLst xmlns:a="http://schemas.openxmlformats.org/drawingml/2006/main">
               <a:ext uri="{FF2B5EF4-FFF2-40B4-BE49-F238E27FC236}">
-                <a16:creationId xmlns:a16="http://schemas.microsoft.com/office/drawing/2014/main" id="{558872F5-3542-4193-B8C3-DC2E65BCEB0F}"/>
+                <a16:creationId xmlns:a16="http://schemas.microsoft.com/office/drawing/2014/main" id="{3945A0F7-F174-45E1-B878-334EF13B0CD9}"/>
               </a:ext>
             </a:extLst>
           </p:cNvPr>
@@ -10469,7 +10477,7 @@
           <p:cNvPr id="10" name="">
             <a:extLst xmlns:a="http://schemas.openxmlformats.org/drawingml/2006/main">
               <a:ext uri="{FF2B5EF4-FFF2-40B4-BE49-F238E27FC236}">
-                <a16:creationId xmlns:a16="http://schemas.microsoft.com/office/drawing/2014/main" id="{522B4563-BC2F-45B8-825D-8BBDEC4479A8}"/>
+                <a16:creationId xmlns:a16="http://schemas.microsoft.com/office/drawing/2014/main" id="{635F8AB1-1EF5-4D13-9C1B-B60BB88E9315}"/>
               </a:ext>
             </a:extLst>
           </p:cNvPr>
@@ -10526,7 +10534,7 @@
           <p:cNvPr id="11" name="">
             <a:extLst xmlns:a="http://schemas.openxmlformats.org/drawingml/2006/main">
               <a:ext uri="{FF2B5EF4-FFF2-40B4-BE49-F238E27FC236}">
-                <a16:creationId xmlns:a16="http://schemas.microsoft.com/office/drawing/2014/main" id="{AD462796-E1CE-4E1F-B524-B366A207CE11}"/>
+                <a16:creationId xmlns:a16="http://schemas.microsoft.com/office/drawing/2014/main" id="{16150803-72DA-4B5A-8FD0-E3EA53657B64}"/>
               </a:ext>
             </a:extLst>
           </p:cNvPr>
@@ -10583,7 +10591,7 @@
           <p:cNvPr id="12" name="">
             <a:extLst xmlns:a="http://schemas.openxmlformats.org/drawingml/2006/main">
               <a:ext uri="{FF2B5EF4-FFF2-40B4-BE49-F238E27FC236}">
-                <a16:creationId xmlns:a16="http://schemas.microsoft.com/office/drawing/2014/main" id="{26BBFDDC-F558-4B2B-A09A-E756731856A8}"/>
+                <a16:creationId xmlns:a16="http://schemas.microsoft.com/office/drawing/2014/main" id="{3440A82E-D448-4BFA-9E2A-1B5BA6769616}"/>
               </a:ext>
             </a:extLst>
           </p:cNvPr>
@@ -10640,7 +10648,7 @@
           <p:cNvPr id="13" name="">
             <a:extLst xmlns:a="http://schemas.openxmlformats.org/drawingml/2006/main">
               <a:ext uri="{FF2B5EF4-FFF2-40B4-BE49-F238E27FC236}">
-                <a16:creationId xmlns:a16="http://schemas.microsoft.com/office/drawing/2014/main" id="{786DF46F-79C6-4D35-9E81-E2B7485996C4}"/>
+                <a16:creationId xmlns:a16="http://schemas.microsoft.com/office/drawing/2014/main" id="{57813673-EEE3-4725-AF11-3661834193ED}"/>
               </a:ext>
             </a:extLst>
           </p:cNvPr>
@@ -10697,7 +10705,7 @@
           <p:cNvPr id="14" name="">
             <a:extLst xmlns:a="http://schemas.openxmlformats.org/drawingml/2006/main">
               <a:ext uri="{FF2B5EF4-FFF2-40B4-BE49-F238E27FC236}">
-                <a16:creationId xmlns:a16="http://schemas.microsoft.com/office/drawing/2014/main" id="{03E3301B-8316-41F6-BF31-71F6A1F2CA99}"/>
+                <a16:creationId xmlns:a16="http://schemas.microsoft.com/office/drawing/2014/main" id="{D9916F15-E7D0-4BA1-A18D-95DF647E6B56}"/>
               </a:ext>
             </a:extLst>
           </p:cNvPr>
@@ -10754,7 +10762,7 @@
           <p:cNvPr id="15" name="">
             <a:extLst xmlns:a="http://schemas.openxmlformats.org/drawingml/2006/main">
               <a:ext uri="{FF2B5EF4-FFF2-40B4-BE49-F238E27FC236}">
-                <a16:creationId xmlns:a16="http://schemas.microsoft.com/office/drawing/2014/main" id="{65C3A29F-48A6-47B0-B9E2-21321551BFF7}"/>
+                <a16:creationId xmlns:a16="http://schemas.microsoft.com/office/drawing/2014/main" id="{2FA93120-FDA3-44F1-A06D-7DCFDCE2EEE5}"/>
               </a:ext>
             </a:extLst>
           </p:cNvPr>
@@ -10809,7 +10817,7 @@
     </p:spTree>
     <p:extLst>
       <p:ext uri="{BB962C8B-B14F-4D97-AF65-F5344CB8AC3E}">
-        <p14:creationId xmlns:p14="http://schemas.microsoft.com/office/powerpoint/2010/main" val="883481671"/>
+        <p14:creationId xmlns:p14="http://schemas.microsoft.com/office/powerpoint/2010/main" val="34741662"/>
       </p:ext>
     </p:extLst>
   </p:cSld>
@@ -10964,7 +10972,7 @@
           <p:cNvPr id="16" name="">
             <a:extLst xmlns:a="http://schemas.openxmlformats.org/drawingml/2006/main">
               <a:ext uri="{FF2B5EF4-FFF2-40B4-BE49-F238E27FC236}">
-                <a16:creationId xmlns:a16="http://schemas.microsoft.com/office/drawing/2014/main" id="{E524DFDC-4810-427F-B6BC-F46AA64F89E7}"/>
+                <a16:creationId xmlns:a16="http://schemas.microsoft.com/office/drawing/2014/main" id="{E7969003-BE1D-4E62-AC01-AD6F7A04555C}"/>
               </a:ext>
             </a:extLst>
           </p:cNvPr>
@@ -10996,7 +11004,7 @@
           <p:cNvPr id="2" name="">
             <a:extLst xmlns:a="http://schemas.openxmlformats.org/drawingml/2006/main">
               <a:ext uri="{FF2B5EF4-FFF2-40B4-BE49-F238E27FC236}">
-                <a16:creationId xmlns:a16="http://schemas.microsoft.com/office/drawing/2014/main" id="{49DDAB30-86A3-4CB5-9361-ED5964181BB3}"/>
+                <a16:creationId xmlns:a16="http://schemas.microsoft.com/office/drawing/2014/main" id="{2E37D101-ED98-48FA-A34F-0F637C255665}"/>
               </a:ext>
             </a:extLst>
           </p:cNvPr>
@@ -11053,7 +11061,7 @@
           <p:cNvPr id="3" name="">
             <a:extLst xmlns:a="http://schemas.openxmlformats.org/drawingml/2006/main">
               <a:ext uri="{FF2B5EF4-FFF2-40B4-BE49-F238E27FC236}">
-                <a16:creationId xmlns:a16="http://schemas.microsoft.com/office/drawing/2014/main" id="{1F4CB13C-8CE9-4BEC-A898-CE9CF068D509}"/>
+                <a16:creationId xmlns:a16="http://schemas.microsoft.com/office/drawing/2014/main" id="{6282FE2F-3243-4421-AC5D-AC60E467F8AD}"/>
               </a:ext>
             </a:extLst>
           </p:cNvPr>
@@ -11085,7 +11093,7 @@
           <p:cNvPr id="4" name="">
             <a:extLst xmlns:a="http://schemas.openxmlformats.org/drawingml/2006/main">
               <a:ext uri="{FF2B5EF4-FFF2-40B4-BE49-F238E27FC236}">
-                <a16:creationId xmlns:a16="http://schemas.microsoft.com/office/drawing/2014/main" id="{BC8A6A31-77D1-4F9B-8CE4-83333F0362F1}"/>
+                <a16:creationId xmlns:a16="http://schemas.microsoft.com/office/drawing/2014/main" id="{DF055344-B87C-42FD-A1A6-852D25E39C77}"/>
               </a:ext>
             </a:extLst>
           </p:cNvPr>
@@ -11142,7 +11150,7 @@
           <p:cNvPr id="5" name="">
             <a:extLst xmlns:a="http://schemas.openxmlformats.org/drawingml/2006/main">
               <a:ext uri="{FF2B5EF4-FFF2-40B4-BE49-F238E27FC236}">
-                <a16:creationId xmlns:a16="http://schemas.microsoft.com/office/drawing/2014/main" id="{1EE8BE5A-95B6-454D-9487-1C70DBD404FF}"/>
+                <a16:creationId xmlns:a16="http://schemas.microsoft.com/office/drawing/2014/main" id="{3D535747-412D-4A71-A93D-351F033CD59A}"/>
               </a:ext>
             </a:extLst>
           </p:cNvPr>
@@ -11199,7 +11207,7 @@
           <p:cNvPr id="6" name="">
             <a:extLst xmlns:a="http://schemas.openxmlformats.org/drawingml/2006/main">
               <a:ext uri="{FF2B5EF4-FFF2-40B4-BE49-F238E27FC236}">
-                <a16:creationId xmlns:a16="http://schemas.microsoft.com/office/drawing/2014/main" id="{0E5581A9-4A38-4A98-A2CE-4788AA77914D}"/>
+                <a16:creationId xmlns:a16="http://schemas.microsoft.com/office/drawing/2014/main" id="{2DE0F927-86D0-4F6D-AB9E-669085CB57A0}"/>
               </a:ext>
             </a:extLst>
           </p:cNvPr>
@@ -11256,7 +11264,7 @@
           <p:cNvPr id="7" name="">
             <a:extLst xmlns:a="http://schemas.openxmlformats.org/drawingml/2006/main">
               <a:ext uri="{FF2B5EF4-FFF2-40B4-BE49-F238E27FC236}">
-                <a16:creationId xmlns:a16="http://schemas.microsoft.com/office/drawing/2014/main" id="{3DC4C1B1-7636-4E6F-92BC-2066152082C5}"/>
+                <a16:creationId xmlns:a16="http://schemas.microsoft.com/office/drawing/2014/main" id="{206CF4D3-85E3-4632-89BF-62DA3E962EA7}"/>
               </a:ext>
             </a:extLst>
           </p:cNvPr>
@@ -11288,7 +11296,7 @@
           <p:cNvPr id="8" name="">
             <a:extLst xmlns:a="http://schemas.openxmlformats.org/drawingml/2006/main">
               <a:ext uri="{FF2B5EF4-FFF2-40B4-BE49-F238E27FC236}">
-                <a16:creationId xmlns:a16="http://schemas.microsoft.com/office/drawing/2014/main" id="{669D8FE8-4138-49DA-933F-F8B69CEABF48}"/>
+                <a16:creationId xmlns:a16="http://schemas.microsoft.com/office/drawing/2014/main" id="{3434725C-F178-48D2-AB0D-6C87466B36BA}"/>
               </a:ext>
             </a:extLst>
           </p:cNvPr>
@@ -11345,7 +11353,7 @@
           <p:cNvPr id="9" name="">
             <a:extLst xmlns:a="http://schemas.openxmlformats.org/drawingml/2006/main">
               <a:ext uri="{FF2B5EF4-FFF2-40B4-BE49-F238E27FC236}">
-                <a16:creationId xmlns:a16="http://schemas.microsoft.com/office/drawing/2014/main" id="{04B3DEE1-6005-4F6A-9747-EB9D9CFD537C}"/>
+                <a16:creationId xmlns:a16="http://schemas.microsoft.com/office/drawing/2014/main" id="{F1849030-1670-4768-A1E8-D33ADBF37CB3}"/>
               </a:ext>
             </a:extLst>
           </p:cNvPr>
@@ -11406,7 +11414,7 @@
           <p:nvPr/>
         </p:nvPicPr>
         <p:blipFill>
-          <a:blip xmlns:r="http://schemas.openxmlformats.org/officeDocument/2006/relationships" xmlns:a="http://schemas.openxmlformats.org/drawingml/2006/main" r:embed="R19b402c48a51412f"/>
+          <a:blip xmlns:r="http://schemas.openxmlformats.org/officeDocument/2006/relationships" xmlns:a="http://schemas.openxmlformats.org/drawingml/2006/main" r:embed="R2173d95a0b46487f"/>
           <a:stretch xmlns:a="http://schemas.openxmlformats.org/drawingml/2006/main"/>
         </p:blipFill>
         <p:spPr>
@@ -11424,7 +11432,7 @@
           <p:cNvPr id="11" name="">
             <a:extLst xmlns:a="http://schemas.openxmlformats.org/drawingml/2006/main">
               <a:ext uri="{FF2B5EF4-FFF2-40B4-BE49-F238E27FC236}">
-                <a16:creationId xmlns:a16="http://schemas.microsoft.com/office/drawing/2014/main" id="{8CFBA025-EBC6-4B37-89A4-501F242AE0E1}"/>
+                <a16:creationId xmlns:a16="http://schemas.microsoft.com/office/drawing/2014/main" id="{B8757312-8CDA-4F50-B016-224723BCFEA3}"/>
               </a:ext>
             </a:extLst>
           </p:cNvPr>
@@ -11481,7 +11489,7 @@
           <p:cNvPr id="12" name="">
             <a:extLst xmlns:a="http://schemas.openxmlformats.org/drawingml/2006/main">
               <a:ext uri="{FF2B5EF4-FFF2-40B4-BE49-F238E27FC236}">
-                <a16:creationId xmlns:a16="http://schemas.microsoft.com/office/drawing/2014/main" id="{F75CF351-FA42-463A-B60D-94FC0DC31062}"/>
+                <a16:creationId xmlns:a16="http://schemas.microsoft.com/office/drawing/2014/main" id="{4EE79398-4D45-40DC-ACE6-BF438EA4D2A0}"/>
               </a:ext>
             </a:extLst>
           </p:cNvPr>
@@ -11538,7 +11546,7 @@
           <p:cNvPr id="13" name="">
             <a:extLst xmlns:a="http://schemas.openxmlformats.org/drawingml/2006/main">
               <a:ext uri="{FF2B5EF4-FFF2-40B4-BE49-F238E27FC236}">
-                <a16:creationId xmlns:a16="http://schemas.microsoft.com/office/drawing/2014/main" id="{20719C72-1EB2-4716-BB10-D325FDA60249}"/>
+                <a16:creationId xmlns:a16="http://schemas.microsoft.com/office/drawing/2014/main" id="{BB58FBEE-592C-41AD-9FBD-F92D619B6E88}"/>
               </a:ext>
             </a:extLst>
           </p:cNvPr>
@@ -11570,7 +11578,7 @@
           <p:cNvPr id="14" name="">
             <a:extLst xmlns:a="http://schemas.openxmlformats.org/drawingml/2006/main">
               <a:ext uri="{FF2B5EF4-FFF2-40B4-BE49-F238E27FC236}">
-                <a16:creationId xmlns:a16="http://schemas.microsoft.com/office/drawing/2014/main" id="{5076FCB4-7FEA-480E-83F5-29EBD5106658}"/>
+                <a16:creationId xmlns:a16="http://schemas.microsoft.com/office/drawing/2014/main" id="{89B1216C-64CB-4C1E-94B2-DE752E075089}"/>
               </a:ext>
             </a:extLst>
           </p:cNvPr>
@@ -11627,7 +11635,7 @@
           <p:cNvPr id="15" name="">
             <a:extLst xmlns:a="http://schemas.openxmlformats.org/drawingml/2006/main">
               <a:ext uri="{FF2B5EF4-FFF2-40B4-BE49-F238E27FC236}">
-                <a16:creationId xmlns:a16="http://schemas.microsoft.com/office/drawing/2014/main" id="{08BEA833-2F02-426B-8B21-99641B474014}"/>
+                <a16:creationId xmlns:a16="http://schemas.microsoft.com/office/drawing/2014/main" id="{438E7A4E-C3C7-48E5-978A-EC6D6A5055D3}"/>
               </a:ext>
             </a:extLst>
           </p:cNvPr>
@@ -11682,7 +11690,7 @@
     </p:spTree>
     <p:extLst>
       <p:ext uri="{BB962C8B-B14F-4D97-AF65-F5344CB8AC3E}">
-        <p14:creationId xmlns:p14="http://schemas.microsoft.com/office/powerpoint/2010/main" val="1988195169"/>
+        <p14:creationId xmlns:p14="http://schemas.microsoft.com/office/powerpoint/2010/main" val="15848227"/>
       </p:ext>
     </p:extLst>
   </p:cSld>
@@ -11837,7 +11845,7 @@
           <p:cNvPr id="23" name="">
             <a:extLst xmlns:a="http://schemas.openxmlformats.org/drawingml/2006/main">
               <a:ext uri="{FF2B5EF4-FFF2-40B4-BE49-F238E27FC236}">
-                <a16:creationId xmlns:a16="http://schemas.microsoft.com/office/drawing/2014/main" id="{8A9BBDAE-5F01-44E1-B4D6-B1BDAF1DDD5C}"/>
+                <a16:creationId xmlns:a16="http://schemas.microsoft.com/office/drawing/2014/main" id="{BC91F459-25F6-4679-8E29-2B1CBD8F571E}"/>
               </a:ext>
             </a:extLst>
           </p:cNvPr>
@@ -11869,7 +11877,7 @@
           <p:cNvPr id="2" name="">
             <a:extLst xmlns:a="http://schemas.openxmlformats.org/drawingml/2006/main">
               <a:ext uri="{FF2B5EF4-FFF2-40B4-BE49-F238E27FC236}">
-                <a16:creationId xmlns:a16="http://schemas.microsoft.com/office/drawing/2014/main" id="{D4728EC9-F53D-4853-9148-94AA3B40A88A}"/>
+                <a16:creationId xmlns:a16="http://schemas.microsoft.com/office/drawing/2014/main" id="{F2C065F9-3BA9-494F-B2CC-8D0AF252FBC7}"/>
               </a:ext>
             </a:extLst>
           </p:cNvPr>
@@ -11926,7 +11934,7 @@
           <p:cNvPr id="3" name="">
             <a:extLst xmlns:a="http://schemas.openxmlformats.org/drawingml/2006/main">
               <a:ext uri="{FF2B5EF4-FFF2-40B4-BE49-F238E27FC236}">
-                <a16:creationId xmlns:a16="http://schemas.microsoft.com/office/drawing/2014/main" id="{AB3E1F0E-5318-4B6F-AE24-256FC08A25D4}"/>
+                <a16:creationId xmlns:a16="http://schemas.microsoft.com/office/drawing/2014/main" id="{575CDFD6-A2A9-4F0A-9C73-68DE4B2CCD56}"/>
               </a:ext>
             </a:extLst>
           </p:cNvPr>
@@ -11958,7 +11966,7 @@
           <p:cNvPr id="4" name="">
             <a:extLst xmlns:a="http://schemas.openxmlformats.org/drawingml/2006/main">
               <a:ext uri="{FF2B5EF4-FFF2-40B4-BE49-F238E27FC236}">
-                <a16:creationId xmlns:a16="http://schemas.microsoft.com/office/drawing/2014/main" id="{C7226A87-EC90-4003-9D75-487D3FB989C0}"/>
+                <a16:creationId xmlns:a16="http://schemas.microsoft.com/office/drawing/2014/main" id="{F967A1FD-033A-4A04-8896-3CB344FDDB53}"/>
               </a:ext>
             </a:extLst>
           </p:cNvPr>
@@ -12015,7 +12023,7 @@
           <p:cNvPr id="5" name="">
             <a:extLst xmlns:a="http://schemas.openxmlformats.org/drawingml/2006/main">
               <a:ext uri="{FF2B5EF4-FFF2-40B4-BE49-F238E27FC236}">
-                <a16:creationId xmlns:a16="http://schemas.microsoft.com/office/drawing/2014/main" id="{2F46CCAF-F12E-4C46-917C-8D3BA804F3AB}"/>
+                <a16:creationId xmlns:a16="http://schemas.microsoft.com/office/drawing/2014/main" id="{3189C59B-9FB6-4572-A639-B6412546EA00}"/>
               </a:ext>
             </a:extLst>
           </p:cNvPr>
@@ -12072,7 +12080,7 @@
           <p:cNvPr id="6" name="">
             <a:extLst xmlns:a="http://schemas.openxmlformats.org/drawingml/2006/main">
               <a:ext uri="{FF2B5EF4-FFF2-40B4-BE49-F238E27FC236}">
-                <a16:creationId xmlns:a16="http://schemas.microsoft.com/office/drawing/2014/main" id="{FA5543E2-6C37-4955-8A70-DBD4E9ECC564}"/>
+                <a16:creationId xmlns:a16="http://schemas.microsoft.com/office/drawing/2014/main" id="{19348DD0-1EEE-4F87-9616-E759830C8531}"/>
               </a:ext>
             </a:extLst>
           </p:cNvPr>
@@ -12129,7 +12137,7 @@
           <p:cNvPr id="7" name="">
             <a:extLst xmlns:a="http://schemas.openxmlformats.org/drawingml/2006/main">
               <a:ext uri="{FF2B5EF4-FFF2-40B4-BE49-F238E27FC236}">
-                <a16:creationId xmlns:a16="http://schemas.microsoft.com/office/drawing/2014/main" id="{F0CF7464-B726-46DB-B4C6-FF017AA24631}"/>
+                <a16:creationId xmlns:a16="http://schemas.microsoft.com/office/drawing/2014/main" id="{5E03FBF7-0891-4F42-A3A1-F07D566BD3DB}"/>
               </a:ext>
             </a:extLst>
           </p:cNvPr>
@@ -12161,7 +12169,7 @@
           <p:cNvPr id="8" name="">
             <a:extLst xmlns:a="http://schemas.openxmlformats.org/drawingml/2006/main">
               <a:ext uri="{FF2B5EF4-FFF2-40B4-BE49-F238E27FC236}">
-                <a16:creationId xmlns:a16="http://schemas.microsoft.com/office/drawing/2014/main" id="{1E3193FD-8BB8-4EB3-9926-A8729B7B2666}"/>
+                <a16:creationId xmlns:a16="http://schemas.microsoft.com/office/drawing/2014/main" id="{8376FF99-5BCF-46D8-93DF-9B7920DC0C9B}"/>
               </a:ext>
             </a:extLst>
           </p:cNvPr>
@@ -12218,7 +12226,7 @@
           <p:cNvPr id="9" name="">
             <a:extLst xmlns:a="http://schemas.openxmlformats.org/drawingml/2006/main">
               <a:ext uri="{FF2B5EF4-FFF2-40B4-BE49-F238E27FC236}">
-                <a16:creationId xmlns:a16="http://schemas.microsoft.com/office/drawing/2014/main" id="{60211E84-7255-4971-83C7-2B7E98607D0A}"/>
+                <a16:creationId xmlns:a16="http://schemas.microsoft.com/office/drawing/2014/main" id="{F271DEF1-54C0-4FA1-91FA-BF4ECAF8FEEC}"/>
               </a:ext>
             </a:extLst>
           </p:cNvPr>
@@ -12275,7 +12283,7 @@
           <p:cNvPr id="10" name="">
             <a:extLst xmlns:a="http://schemas.openxmlformats.org/drawingml/2006/main">
               <a:ext uri="{FF2B5EF4-FFF2-40B4-BE49-F238E27FC236}">
-                <a16:creationId xmlns:a16="http://schemas.microsoft.com/office/drawing/2014/main" id="{5048FEBE-64C4-4598-B492-0250EBAF5A8F}"/>
+                <a16:creationId xmlns:a16="http://schemas.microsoft.com/office/drawing/2014/main" id="{4CA7C3FE-1C11-4FBA-938C-3DF70D366D78}"/>
               </a:ext>
             </a:extLst>
           </p:cNvPr>
@@ -12309,7 +12317,7 @@
           <p:cNvPr id="11" name="">
             <a:extLst xmlns:a="http://schemas.openxmlformats.org/drawingml/2006/main">
               <a:ext uri="{FF2B5EF4-FFF2-40B4-BE49-F238E27FC236}">
-                <a16:creationId xmlns:a16="http://schemas.microsoft.com/office/drawing/2014/main" id="{1D1A0825-064D-4794-9AE2-3C4795847BCF}"/>
+                <a16:creationId xmlns:a16="http://schemas.microsoft.com/office/drawing/2014/main" id="{2DF4BBA1-854C-42D2-AB81-C1552BDF912D}"/>
               </a:ext>
             </a:extLst>
           </p:cNvPr>
@@ -12341,7 +12349,7 @@
           <p:cNvPr id="12" name="">
             <a:extLst xmlns:a="http://schemas.openxmlformats.org/drawingml/2006/main">
               <a:ext uri="{FF2B5EF4-FFF2-40B4-BE49-F238E27FC236}">
-                <a16:creationId xmlns:a16="http://schemas.microsoft.com/office/drawing/2014/main" id="{9F6A4E6C-F8EC-4ADE-9357-E8E311616B06}"/>
+                <a16:creationId xmlns:a16="http://schemas.microsoft.com/office/drawing/2014/main" id="{6B23A9FE-C19E-4585-B712-375ED417EF17}"/>
               </a:ext>
             </a:extLst>
           </p:cNvPr>
@@ -12398,7 +12406,7 @@
           <p:cNvPr id="13" name="">
             <a:extLst xmlns:a="http://schemas.openxmlformats.org/drawingml/2006/main">
               <a:ext uri="{FF2B5EF4-FFF2-40B4-BE49-F238E27FC236}">
-                <a16:creationId xmlns:a16="http://schemas.microsoft.com/office/drawing/2014/main" id="{EF6A02B3-68E0-46A8-8A5D-F0DA984ECF2D}"/>
+                <a16:creationId xmlns:a16="http://schemas.microsoft.com/office/drawing/2014/main" id="{9E88AD03-21D2-49DA-9881-A8079F5B9BDF}"/>
               </a:ext>
             </a:extLst>
           </p:cNvPr>
@@ -12455,7 +12463,7 @@
           <p:cNvPr id="14" name="">
             <a:extLst xmlns:a="http://schemas.openxmlformats.org/drawingml/2006/main">
               <a:ext uri="{FF2B5EF4-FFF2-40B4-BE49-F238E27FC236}">
-                <a16:creationId xmlns:a16="http://schemas.microsoft.com/office/drawing/2014/main" id="{347EEAFC-FBB3-4F6B-8356-9CCE9A0A22E1}"/>
+                <a16:creationId xmlns:a16="http://schemas.microsoft.com/office/drawing/2014/main" id="{5987B8FA-FCED-44DA-B3B9-294A80311814}"/>
               </a:ext>
             </a:extLst>
           </p:cNvPr>
@@ -12489,7 +12497,7 @@
           <p:cNvPr id="15" name="">
             <a:extLst xmlns:a="http://schemas.openxmlformats.org/drawingml/2006/main">
               <a:ext uri="{FF2B5EF4-FFF2-40B4-BE49-F238E27FC236}">
-                <a16:creationId xmlns:a16="http://schemas.microsoft.com/office/drawing/2014/main" id="{9A066319-23AC-4B47-9B8E-1CD420FDD6C2}"/>
+                <a16:creationId xmlns:a16="http://schemas.microsoft.com/office/drawing/2014/main" id="{4D3D5B67-66ED-45DA-8544-22C77DA0B743}"/>
               </a:ext>
             </a:extLst>
           </p:cNvPr>
@@ -12521,7 +12529,7 @@
           <p:cNvPr id="16" name="">
             <a:extLst xmlns:a="http://schemas.openxmlformats.org/drawingml/2006/main">
               <a:ext uri="{FF2B5EF4-FFF2-40B4-BE49-F238E27FC236}">
-                <a16:creationId xmlns:a16="http://schemas.microsoft.com/office/drawing/2014/main" id="{16700885-C255-457C-BD88-17A0C789836B}"/>
+                <a16:creationId xmlns:a16="http://schemas.microsoft.com/office/drawing/2014/main" id="{3F11C0CB-E05D-4A2D-8D42-CE6BBB2E393B}"/>
               </a:ext>
             </a:extLst>
           </p:cNvPr>
@@ -12578,7 +12586,7 @@
           <p:cNvPr id="17" name="">
             <a:extLst xmlns:a="http://schemas.openxmlformats.org/drawingml/2006/main">
               <a:ext uri="{FF2B5EF4-FFF2-40B4-BE49-F238E27FC236}">
-                <a16:creationId xmlns:a16="http://schemas.microsoft.com/office/drawing/2014/main" id="{A00EA968-249A-4ECF-84DE-9A66B7267A23}"/>
+                <a16:creationId xmlns:a16="http://schemas.microsoft.com/office/drawing/2014/main" id="{D2B685F8-700C-4897-BC2C-A479B8A7C71C}"/>
               </a:ext>
             </a:extLst>
           </p:cNvPr>
@@ -12635,7 +12643,7 @@
           <p:cNvPr id="18" name="">
             <a:extLst xmlns:a="http://schemas.openxmlformats.org/drawingml/2006/main">
               <a:ext uri="{FF2B5EF4-FFF2-40B4-BE49-F238E27FC236}">
-                <a16:creationId xmlns:a16="http://schemas.microsoft.com/office/drawing/2014/main" id="{48D794A2-47B4-4E04-AEAF-0CD4A98BBDAF}"/>
+                <a16:creationId xmlns:a16="http://schemas.microsoft.com/office/drawing/2014/main" id="{695787D3-A1A2-47DC-AEF5-A2B53BA926A2}"/>
               </a:ext>
             </a:extLst>
           </p:cNvPr>
@@ -12669,7 +12677,7 @@
           <p:cNvPr id="19" name="">
             <a:extLst xmlns:a="http://schemas.openxmlformats.org/drawingml/2006/main">
               <a:ext uri="{FF2B5EF4-FFF2-40B4-BE49-F238E27FC236}">
-                <a16:creationId xmlns:a16="http://schemas.microsoft.com/office/drawing/2014/main" id="{98C15B72-DFAF-43B8-AA38-47D8DC5E8E0A}"/>
+                <a16:creationId xmlns:a16="http://schemas.microsoft.com/office/drawing/2014/main" id="{231CF6C3-389D-4F38-8743-F23DDAB03DEA}"/>
               </a:ext>
             </a:extLst>
           </p:cNvPr>
@@ -12701,7 +12709,7 @@
           <p:cNvPr id="20" name="">
             <a:extLst xmlns:a="http://schemas.openxmlformats.org/drawingml/2006/main">
               <a:ext uri="{FF2B5EF4-FFF2-40B4-BE49-F238E27FC236}">
-                <a16:creationId xmlns:a16="http://schemas.microsoft.com/office/drawing/2014/main" id="{01A590E9-9560-4193-B65A-A9C582CA3F5F}"/>
+                <a16:creationId xmlns:a16="http://schemas.microsoft.com/office/drawing/2014/main" id="{69D8DC2B-9873-4FC5-ABDE-C4780E2F0BC3}"/>
               </a:ext>
             </a:extLst>
           </p:cNvPr>
@@ -12758,7 +12766,7 @@
           <p:cNvPr id="21" name="">
             <a:extLst xmlns:a="http://schemas.openxmlformats.org/drawingml/2006/main">
               <a:ext uri="{FF2B5EF4-FFF2-40B4-BE49-F238E27FC236}">
-                <a16:creationId xmlns:a16="http://schemas.microsoft.com/office/drawing/2014/main" id="{F9DD74D7-5D5F-4F17-9C55-19C5D44001E1}"/>
+                <a16:creationId xmlns:a16="http://schemas.microsoft.com/office/drawing/2014/main" id="{31D7C968-1B80-45F9-8D7E-0969893B7DFF}"/>
               </a:ext>
             </a:extLst>
           </p:cNvPr>
@@ -12815,7 +12823,7 @@
           <p:cNvPr id="22" name="">
             <a:extLst xmlns:a="http://schemas.openxmlformats.org/drawingml/2006/main">
               <a:ext uri="{FF2B5EF4-FFF2-40B4-BE49-F238E27FC236}">
-                <a16:creationId xmlns:a16="http://schemas.microsoft.com/office/drawing/2014/main" id="{61A531E6-B4C1-4590-831E-6055D572AE8C}"/>
+                <a16:creationId xmlns:a16="http://schemas.microsoft.com/office/drawing/2014/main" id="{421240D9-C272-4AD6-9A26-22A42F478AF9}"/>
               </a:ext>
             </a:extLst>
           </p:cNvPr>
@@ -12870,7 +12878,7 @@
     </p:spTree>
     <p:extLst>
       <p:ext uri="{BB962C8B-B14F-4D97-AF65-F5344CB8AC3E}">
-        <p14:creationId xmlns:p14="http://schemas.microsoft.com/office/powerpoint/2010/main" val="1771182934"/>
+        <p14:creationId xmlns:p14="http://schemas.microsoft.com/office/powerpoint/2010/main" val="886022763"/>
       </p:ext>
     </p:extLst>
   </p:cSld>
@@ -13071,7 +13079,7 @@
           <p:cNvPr id="22" name="">
             <a:extLst xmlns:a="http://schemas.openxmlformats.org/drawingml/2006/main">
               <a:ext uri="{FF2B5EF4-FFF2-40B4-BE49-F238E27FC236}">
-                <a16:creationId xmlns:a16="http://schemas.microsoft.com/office/drawing/2014/main" id="{5B005E6C-5F16-4CC9-BE83-6BD982213D1F}"/>
+                <a16:creationId xmlns:a16="http://schemas.microsoft.com/office/drawing/2014/main" id="{372F2D7B-5533-4F08-836D-4F0DA6620185}"/>
               </a:ext>
             </a:extLst>
           </p:cNvPr>
@@ -13103,7 +13111,7 @@
           <p:cNvPr id="2" name="">
             <a:extLst xmlns:a="http://schemas.openxmlformats.org/drawingml/2006/main">
               <a:ext uri="{FF2B5EF4-FFF2-40B4-BE49-F238E27FC236}">
-                <a16:creationId xmlns:a16="http://schemas.microsoft.com/office/drawing/2014/main" id="{93D60B66-63ED-46E0-95F0-AC8FE4E5B892}"/>
+                <a16:creationId xmlns:a16="http://schemas.microsoft.com/office/drawing/2014/main" id="{9DF641A0-FBD7-474A-BB55-70E376BE507C}"/>
               </a:ext>
             </a:extLst>
           </p:cNvPr>
@@ -13160,7 +13168,7 @@
           <p:cNvPr id="3" name="">
             <a:extLst xmlns:a="http://schemas.openxmlformats.org/drawingml/2006/main">
               <a:ext uri="{FF2B5EF4-FFF2-40B4-BE49-F238E27FC236}">
-                <a16:creationId xmlns:a16="http://schemas.microsoft.com/office/drawing/2014/main" id="{03F3BB5E-5465-4915-A726-ACC436F4352F}"/>
+                <a16:creationId xmlns:a16="http://schemas.microsoft.com/office/drawing/2014/main" id="{A1D20A73-337C-456F-A270-9A0A70982249}"/>
               </a:ext>
             </a:extLst>
           </p:cNvPr>
@@ -13192,7 +13200,7 @@
           <p:cNvPr id="4" name="">
             <a:extLst xmlns:a="http://schemas.openxmlformats.org/drawingml/2006/main">
               <a:ext uri="{FF2B5EF4-FFF2-40B4-BE49-F238E27FC236}">
-                <a16:creationId xmlns:a16="http://schemas.microsoft.com/office/drawing/2014/main" id="{5D62EAA7-AEB9-4BB3-9B4F-E5855AA5EF9D}"/>
+                <a16:creationId xmlns:a16="http://schemas.microsoft.com/office/drawing/2014/main" id="{C23C725A-FFD5-4442-86AD-15D68CCA3654}"/>
               </a:ext>
             </a:extLst>
           </p:cNvPr>
@@ -13249,7 +13257,7 @@
           <p:cNvPr id="5" name="">
             <a:extLst xmlns:a="http://schemas.openxmlformats.org/drawingml/2006/main">
               <a:ext uri="{FF2B5EF4-FFF2-40B4-BE49-F238E27FC236}">
-                <a16:creationId xmlns:a16="http://schemas.microsoft.com/office/drawing/2014/main" id="{9989DA5B-688D-4033-8A5A-61774F5EBE73}"/>
+                <a16:creationId xmlns:a16="http://schemas.microsoft.com/office/drawing/2014/main" id="{96F9F9A2-C639-4575-AB4F-D7CF3A935C1D}"/>
               </a:ext>
             </a:extLst>
           </p:cNvPr>
@@ -13306,7 +13314,7 @@
           <p:cNvPr id="6" name="">
             <a:extLst xmlns:a="http://schemas.openxmlformats.org/drawingml/2006/main">
               <a:ext uri="{FF2B5EF4-FFF2-40B4-BE49-F238E27FC236}">
-                <a16:creationId xmlns:a16="http://schemas.microsoft.com/office/drawing/2014/main" id="{6C960038-FE30-475C-A258-8B7B39A1B146}"/>
+                <a16:creationId xmlns:a16="http://schemas.microsoft.com/office/drawing/2014/main" id="{282A38BD-7BC7-4CE6-AC69-F76A44549EE9}"/>
               </a:ext>
             </a:extLst>
           </p:cNvPr>
@@ -13363,7 +13371,7 @@
           <p:cNvPr id="7" name="">
             <a:extLst xmlns:a="http://schemas.openxmlformats.org/drawingml/2006/main">
               <a:ext uri="{FF2B5EF4-FFF2-40B4-BE49-F238E27FC236}">
-                <a16:creationId xmlns:a16="http://schemas.microsoft.com/office/drawing/2014/main" id="{F71E836E-6949-4A88-87E9-1AB45446086B}"/>
+                <a16:creationId xmlns:a16="http://schemas.microsoft.com/office/drawing/2014/main" id="{EB459F1F-2430-4366-9C69-F8515A3D6354}"/>
               </a:ext>
             </a:extLst>
           </p:cNvPr>
@@ -13395,7 +13403,7 @@
           <p:cNvPr id="8" name="">
             <a:extLst xmlns:a="http://schemas.openxmlformats.org/drawingml/2006/main">
               <a:ext uri="{FF2B5EF4-FFF2-40B4-BE49-F238E27FC236}">
-                <a16:creationId xmlns:a16="http://schemas.microsoft.com/office/drawing/2014/main" id="{FA645998-6A8D-4372-BE67-3BE0755B8DAA}"/>
+                <a16:creationId xmlns:a16="http://schemas.microsoft.com/office/drawing/2014/main" id="{8F49360D-A242-45B6-ABE6-9CF031073A35}"/>
               </a:ext>
             </a:extLst>
           </p:cNvPr>
@@ -13452,7 +13460,7 @@
           <p:cNvPr id="9" name="">
             <a:extLst xmlns:a="http://schemas.openxmlformats.org/drawingml/2006/main">
               <a:ext uri="{FF2B5EF4-FFF2-40B4-BE49-F238E27FC236}">
-                <a16:creationId xmlns:a16="http://schemas.microsoft.com/office/drawing/2014/main" id="{86EEA195-2951-481A-8C3B-95582153F971}"/>
+                <a16:creationId xmlns:a16="http://schemas.microsoft.com/office/drawing/2014/main" id="{DB752FB0-5E65-4DD7-8277-0C21F90FE446}"/>
               </a:ext>
             </a:extLst>
           </p:cNvPr>
@@ -13509,7 +13517,7 @@
           <p:cNvPr id="10" name="">
             <a:extLst xmlns:a="http://schemas.openxmlformats.org/drawingml/2006/main">
               <a:ext uri="{FF2B5EF4-FFF2-40B4-BE49-F238E27FC236}">
-                <a16:creationId xmlns:a16="http://schemas.microsoft.com/office/drawing/2014/main" id="{9F252CE2-8E06-47E7-A8DC-19295B3F5A43}"/>
+                <a16:creationId xmlns:a16="http://schemas.microsoft.com/office/drawing/2014/main" id="{911FB447-28C1-4D91-A358-0404F1808587}"/>
               </a:ext>
             </a:extLst>
           </p:cNvPr>
@@ -13543,7 +13551,7 @@
           <p:cNvPr id="11" name="">
             <a:extLst xmlns:a="http://schemas.openxmlformats.org/drawingml/2006/main">
               <a:ext uri="{FF2B5EF4-FFF2-40B4-BE49-F238E27FC236}">
-                <a16:creationId xmlns:a16="http://schemas.microsoft.com/office/drawing/2014/main" id="{5E555778-1812-4CF6-8167-8AF49B683DFB}"/>
+                <a16:creationId xmlns:a16="http://schemas.microsoft.com/office/drawing/2014/main" id="{AC76732B-0B5B-4A3A-B054-44C978867075}"/>
               </a:ext>
             </a:extLst>
           </p:cNvPr>
@@ -13575,7 +13583,7 @@
           <p:cNvPr id="12" name="">
             <a:extLst xmlns:a="http://schemas.openxmlformats.org/drawingml/2006/main">
               <a:ext uri="{FF2B5EF4-FFF2-40B4-BE49-F238E27FC236}">
-                <a16:creationId xmlns:a16="http://schemas.microsoft.com/office/drawing/2014/main" id="{0EEDB95B-8904-4060-B1E4-14BAF3F7B1AA}"/>
+                <a16:creationId xmlns:a16="http://schemas.microsoft.com/office/drawing/2014/main" id="{A4301267-40A6-42A4-BAF5-FC16C5685F08}"/>
               </a:ext>
             </a:extLst>
           </p:cNvPr>
@@ -13632,7 +13640,7 @@
           <p:cNvPr id="13" name="">
             <a:extLst xmlns:a="http://schemas.openxmlformats.org/drawingml/2006/main">
               <a:ext uri="{FF2B5EF4-FFF2-40B4-BE49-F238E27FC236}">
-                <a16:creationId xmlns:a16="http://schemas.microsoft.com/office/drawing/2014/main" id="{18CFB820-D16B-4EA6-AE12-1578A48C1326}"/>
+                <a16:creationId xmlns:a16="http://schemas.microsoft.com/office/drawing/2014/main" id="{CB941693-0C72-4E81-B6B8-46DE52ADFEBB}"/>
               </a:ext>
             </a:extLst>
           </p:cNvPr>
@@ -13689,7 +13697,7 @@
           <p:cNvPr id="14" name="">
             <a:extLst xmlns:a="http://schemas.openxmlformats.org/drawingml/2006/main">
               <a:ext uri="{FF2B5EF4-FFF2-40B4-BE49-F238E27FC236}">
-                <a16:creationId xmlns:a16="http://schemas.microsoft.com/office/drawing/2014/main" id="{7D37C1B4-A809-432A-A712-63C0388A1289}"/>
+                <a16:creationId xmlns:a16="http://schemas.microsoft.com/office/drawing/2014/main" id="{77206D56-85B4-4770-8C5D-F995B5C49F52}"/>
               </a:ext>
             </a:extLst>
           </p:cNvPr>
@@ -13723,7 +13731,7 @@
           <p:cNvPr id="15" name="">
             <a:extLst xmlns:a="http://schemas.openxmlformats.org/drawingml/2006/main">
               <a:ext uri="{FF2B5EF4-FFF2-40B4-BE49-F238E27FC236}">
-                <a16:creationId xmlns:a16="http://schemas.microsoft.com/office/drawing/2014/main" id="{CABC51D2-1187-443C-83AD-08BF7D849120}"/>
+                <a16:creationId xmlns:a16="http://schemas.microsoft.com/office/drawing/2014/main" id="{401BCDE1-8854-4FD4-BE98-D5CD77171C19}"/>
               </a:ext>
             </a:extLst>
           </p:cNvPr>
@@ -13755,7 +13763,7 @@
           <p:cNvPr id="16" name="">
             <a:extLst xmlns:a="http://schemas.openxmlformats.org/drawingml/2006/main">
               <a:ext uri="{FF2B5EF4-FFF2-40B4-BE49-F238E27FC236}">
-                <a16:creationId xmlns:a16="http://schemas.microsoft.com/office/drawing/2014/main" id="{47FFF62E-FAB3-46C6-94D7-9E23CD055A44}"/>
+                <a16:creationId xmlns:a16="http://schemas.microsoft.com/office/drawing/2014/main" id="{4983C674-E9CD-4A2F-844D-2187E34C9374}"/>
               </a:ext>
             </a:extLst>
           </p:cNvPr>
@@ -13812,7 +13820,7 @@
           <p:cNvPr id="17" name="">
             <a:extLst xmlns:a="http://schemas.openxmlformats.org/drawingml/2006/main">
               <a:ext uri="{FF2B5EF4-FFF2-40B4-BE49-F238E27FC236}">
-                <a16:creationId xmlns:a16="http://schemas.microsoft.com/office/drawing/2014/main" id="{584C2C31-B213-42A0-872E-ECD396F7EA3A}"/>
+                <a16:creationId xmlns:a16="http://schemas.microsoft.com/office/drawing/2014/main" id="{C59FE8FB-1ED5-4212-AAE8-794EE3541FF8}"/>
               </a:ext>
             </a:extLst>
           </p:cNvPr>
@@ -13869,7 +13877,7 @@
           <p:cNvPr id="18" name="">
             <a:extLst xmlns:a="http://schemas.openxmlformats.org/drawingml/2006/main">
               <a:ext uri="{FF2B5EF4-FFF2-40B4-BE49-F238E27FC236}">
-                <a16:creationId xmlns:a16="http://schemas.microsoft.com/office/drawing/2014/main" id="{1BA98C9F-1F93-4BC9-B710-E877BCAFB9E1}"/>
+                <a16:creationId xmlns:a16="http://schemas.microsoft.com/office/drawing/2014/main" id="{3C5A114D-7332-4B79-BEC6-E1C08E4DCAD3}"/>
               </a:ext>
             </a:extLst>
           </p:cNvPr>
@@ -13903,7 +13911,7 @@
           <p:cNvPr id="19" name="">
             <a:extLst xmlns:a="http://schemas.openxmlformats.org/drawingml/2006/main">
               <a:ext uri="{FF2B5EF4-FFF2-40B4-BE49-F238E27FC236}">
-                <a16:creationId xmlns:a16="http://schemas.microsoft.com/office/drawing/2014/main" id="{628540D8-873E-42D1-B269-6FFAC3497F38}"/>
+                <a16:creationId xmlns:a16="http://schemas.microsoft.com/office/drawing/2014/main" id="{51B9B82B-6C86-48BD-BF28-21C0EF4AFED4}"/>
               </a:ext>
             </a:extLst>
           </p:cNvPr>
@@ -13935,7 +13943,7 @@
           <p:cNvPr id="20" name="">
             <a:extLst xmlns:a="http://schemas.openxmlformats.org/drawingml/2006/main">
               <a:ext uri="{FF2B5EF4-FFF2-40B4-BE49-F238E27FC236}">
-                <a16:creationId xmlns:a16="http://schemas.microsoft.com/office/drawing/2014/main" id="{FA7F49A8-75A7-449D-8FFA-19E2E439FDA2}"/>
+                <a16:creationId xmlns:a16="http://schemas.microsoft.com/office/drawing/2014/main" id="{1A82673F-E09C-4A57-8E68-27E3862068E2}"/>
               </a:ext>
             </a:extLst>
           </p:cNvPr>
@@ -13992,7 +14000,7 @@
           <p:cNvPr id="21" name="">
             <a:extLst xmlns:a="http://schemas.openxmlformats.org/drawingml/2006/main">
               <a:ext uri="{FF2B5EF4-FFF2-40B4-BE49-F238E27FC236}">
-                <a16:creationId xmlns:a16="http://schemas.microsoft.com/office/drawing/2014/main" id="{CAF2E883-FCCE-40E2-95E9-9DB905AB5706}"/>
+                <a16:creationId xmlns:a16="http://schemas.microsoft.com/office/drawing/2014/main" id="{09664C8B-7635-49D3-83F5-C873FFD2186D}"/>
               </a:ext>
             </a:extLst>
           </p:cNvPr>
@@ -14047,7 +14055,7 @@
     </p:spTree>
     <p:extLst>
       <p:ext uri="{BB962C8B-B14F-4D97-AF65-F5344CB8AC3E}">
-        <p14:creationId xmlns:p14="http://schemas.microsoft.com/office/powerpoint/2010/main" val="606347382"/>
+        <p14:creationId xmlns:p14="http://schemas.microsoft.com/office/powerpoint/2010/main" val="335612480"/>
       </p:ext>
     </p:extLst>
   </p:cSld>
